--- a/public/lessons/year-6-maths/autumn/week-10/retrieve-place-value-and-rounding/teaching-powerpoint-v1.pptx
+++ b/public/lessons/year-6-maths/autumn/week-10/retrieve-place-value-and-rounding/teaching-powerpoint-v1.pptx
@@ -2,24 +2,24 @@
 <file path=ppt/presentation.xml><?xml version="1.0" encoding="utf-8"?>
 <p:presentation xmlns:p="http://schemas.openxmlformats.org/presentationml/2006/main">
   <p:sldMasterIdLst>
-    <p:sldMasterId xmlns:r="http://schemas.openxmlformats.org/officeDocument/2006/relationships" id="2147483648" r:id="R3c74e3b0cd3440cd"/>
+    <p:sldMasterId xmlns:r="http://schemas.openxmlformats.org/officeDocument/2006/relationships" id="2147483648" r:id="Ra5276ba602ac44be"/>
   </p:sldMasterIdLst>
   <p:notesMasterIdLst>
-    <p:notesMasterId xmlns:r="http://schemas.openxmlformats.org/officeDocument/2006/relationships" r:id="Rb7e15b349d8a4b4d"/>
+    <p:notesMasterId xmlns:r="http://schemas.openxmlformats.org/officeDocument/2006/relationships" r:id="Rde525dcef9034175"/>
   </p:notesMasterIdLst>
   <p:sldIdLst>
-    <p:sldId xmlns:r="http://schemas.openxmlformats.org/officeDocument/2006/relationships" id="256" r:id="R59921852efde4cf9"/>
-    <p:sldId xmlns:r="http://schemas.openxmlformats.org/officeDocument/2006/relationships" id="257" r:id="Ra6875ea3551147f1"/>
-    <p:sldId xmlns:r="http://schemas.openxmlformats.org/officeDocument/2006/relationships" id="258" r:id="R3c059cdf4da74e15"/>
-    <p:sldId xmlns:r="http://schemas.openxmlformats.org/officeDocument/2006/relationships" id="259" r:id="Rb7346d7f45b44514"/>
-    <p:sldId xmlns:r="http://schemas.openxmlformats.org/officeDocument/2006/relationships" id="260" r:id="R9ba373c9959245f5"/>
-    <p:sldId xmlns:r="http://schemas.openxmlformats.org/officeDocument/2006/relationships" id="261" r:id="R1586057b464349ce"/>
-    <p:sldId xmlns:r="http://schemas.openxmlformats.org/officeDocument/2006/relationships" id="262" r:id="R29e7828f45224e1f"/>
-    <p:sldId xmlns:r="http://schemas.openxmlformats.org/officeDocument/2006/relationships" id="263" r:id="R4207f8e219c54601"/>
-    <p:sldId xmlns:r="http://schemas.openxmlformats.org/officeDocument/2006/relationships" id="264" r:id="Rddc8d4f6d6a44b4e"/>
-    <p:sldId xmlns:r="http://schemas.openxmlformats.org/officeDocument/2006/relationships" id="265" r:id="Rc5cde3b173ed4e6a"/>
-    <p:sldId xmlns:r="http://schemas.openxmlformats.org/officeDocument/2006/relationships" id="266" r:id="R6d981dd92b684c39"/>
-    <p:sldId xmlns:r="http://schemas.openxmlformats.org/officeDocument/2006/relationships" id="267" r:id="Rb44b3214333448a5"/>
+    <p:sldId xmlns:r="http://schemas.openxmlformats.org/officeDocument/2006/relationships" id="256" r:id="R411834cdaf9144e9"/>
+    <p:sldId xmlns:r="http://schemas.openxmlformats.org/officeDocument/2006/relationships" id="257" r:id="Rf699b4f894c34f6f"/>
+    <p:sldId xmlns:r="http://schemas.openxmlformats.org/officeDocument/2006/relationships" id="258" r:id="Rbf76ba9be0244c84"/>
+    <p:sldId xmlns:r="http://schemas.openxmlformats.org/officeDocument/2006/relationships" id="259" r:id="R00778438af90413f"/>
+    <p:sldId xmlns:r="http://schemas.openxmlformats.org/officeDocument/2006/relationships" id="260" r:id="R0cd80c2e00b04142"/>
+    <p:sldId xmlns:r="http://schemas.openxmlformats.org/officeDocument/2006/relationships" id="261" r:id="R152f5c0605d7479a"/>
+    <p:sldId xmlns:r="http://schemas.openxmlformats.org/officeDocument/2006/relationships" id="262" r:id="R3b1951e2426a4855"/>
+    <p:sldId xmlns:r="http://schemas.openxmlformats.org/officeDocument/2006/relationships" id="263" r:id="R7ad9ae2712e5414a"/>
+    <p:sldId xmlns:r="http://schemas.openxmlformats.org/officeDocument/2006/relationships" id="264" r:id="R300aa3cc83404b24"/>
+    <p:sldId xmlns:r="http://schemas.openxmlformats.org/officeDocument/2006/relationships" id="265" r:id="R5b3a1c42d9424648"/>
+    <p:sldId xmlns:r="http://schemas.openxmlformats.org/officeDocument/2006/relationships" id="266" r:id="Rf8237b1d178d4f5d"/>
+    <p:sldId xmlns:r="http://schemas.openxmlformats.org/officeDocument/2006/relationships" id="267" r:id="R6bbcf9282a074984"/>
   </p:sldIdLst>
   <p:sldSz cx="12192000" cy="6858000"/>
   <p:notesSz cx="6858000" cy="9144000"/>
@@ -873,7 +873,7 @@
           <a:lstStyle xmlns:a="http://schemas.openxmlformats.org/drawingml/2006/main"/>
           <a:p xmlns:a="http://schemas.openxmlformats.org/drawingml/2006/main">
             <a:r>
-              <a:t>I do. Reveal the question, setup and each calculation stage one click at a time. Pupils watch before copying. Model answer: Order: 6,890,201; 6,908,210; 6,980,120. Rounded: 6,900,000; 6,900,000; 7,000,000.</a:t>
+              <a:t>I do. Reveal the question, then reveal each mathematical change one click at a time. Point to the numbers and operation that changed before moving to the next line. Final answer: Order: 6,890,201; 6,908,210; 6,980,120. Rounded: 6,900,000; 6,900,000; 7,000,000.</a:t>
             </a:r>
           </a:p>
         </p:txBody>
@@ -1291,7 +1291,7 @@
   </p:cSld>
   <p:clrMap bg1="lt1" tx1="dk1" bg2="lt2" tx2="dk2" accent1="accent1" accent2="accent2" accent3="accent3" accent4="accent4" accent5="accent5" accent6="accent6" hlink="hlink" folHlink="folHlink"/>
   <p:sldLayoutIdLst>
-    <p:sldLayoutId xmlns:r="http://schemas.openxmlformats.org/officeDocument/2006/relationships" id="2147483649" r:id="R02fd9b88213e4b87"/>
+    <p:sldLayoutId xmlns:r="http://schemas.openxmlformats.org/officeDocument/2006/relationships" id="2147483649" r:id="R35b70527c1154031"/>
   </p:sldLayoutIdLst>
   <p:txStyles>
     <p:titleStyle>
@@ -1842,7 +1842,7 @@
           <p:cNvPr id="12" name="">
             <a:extLst xmlns:a="http://schemas.openxmlformats.org/drawingml/2006/main">
               <a:ext uri="{FF2B5EF4-FFF2-40B4-BE49-F238E27FC236}">
-                <a16:creationId xmlns:a16="http://schemas.microsoft.com/office/drawing/2014/main" id="{17CCDA14-20FD-4402-AAE5-3459B38FC34F}"/>
+                <a16:creationId xmlns:a16="http://schemas.microsoft.com/office/drawing/2014/main" id="{A8EBBB35-25B5-4D7A-9915-4C7780D2F677}"/>
               </a:ext>
             </a:extLst>
           </p:cNvPr>
@@ -1874,7 +1874,7 @@
           <p:cNvPr id="2" name="">
             <a:extLst xmlns:a="http://schemas.openxmlformats.org/drawingml/2006/main">
               <a:ext uri="{FF2B5EF4-FFF2-40B4-BE49-F238E27FC236}">
-                <a16:creationId xmlns:a16="http://schemas.microsoft.com/office/drawing/2014/main" id="{32BB4F8C-27EC-4CCE-BE90-501C008C509B}"/>
+                <a16:creationId xmlns:a16="http://schemas.microsoft.com/office/drawing/2014/main" id="{F2CA245B-F5A2-43A3-8FF7-AEE793C92CED}"/>
               </a:ext>
             </a:extLst>
           </p:cNvPr>
@@ -1931,7 +1931,7 @@
           <p:cNvPr id="3" name="">
             <a:extLst xmlns:a="http://schemas.openxmlformats.org/drawingml/2006/main">
               <a:ext uri="{FF2B5EF4-FFF2-40B4-BE49-F238E27FC236}">
-                <a16:creationId xmlns:a16="http://schemas.microsoft.com/office/drawing/2014/main" id="{37D0D13F-52CF-497B-8E77-C76EE675D0CE}"/>
+                <a16:creationId xmlns:a16="http://schemas.microsoft.com/office/drawing/2014/main" id="{927AAA27-2D31-4383-B066-926873CA4619}"/>
               </a:ext>
             </a:extLst>
           </p:cNvPr>
@@ -1965,7 +1965,7 @@
           <p:cNvPr id="4" name="">
             <a:extLst xmlns:a="http://schemas.openxmlformats.org/drawingml/2006/main">
               <a:ext uri="{FF2B5EF4-FFF2-40B4-BE49-F238E27FC236}">
-                <a16:creationId xmlns:a16="http://schemas.microsoft.com/office/drawing/2014/main" id="{958E1C9D-C9C6-4F50-96BB-94AA36B54D97}"/>
+                <a16:creationId xmlns:a16="http://schemas.microsoft.com/office/drawing/2014/main" id="{1164878A-FCC0-41D5-AE72-A4082DBEC3F6}"/>
               </a:ext>
             </a:extLst>
           </p:cNvPr>
@@ -2022,7 +2022,7 @@
           <p:cNvPr id="5" name="">
             <a:extLst xmlns:a="http://schemas.openxmlformats.org/drawingml/2006/main">
               <a:ext uri="{FF2B5EF4-FFF2-40B4-BE49-F238E27FC236}">
-                <a16:creationId xmlns:a16="http://schemas.microsoft.com/office/drawing/2014/main" id="{DBF33FF9-583A-4AF7-AE3D-5EF9D63B1B32}"/>
+                <a16:creationId xmlns:a16="http://schemas.microsoft.com/office/drawing/2014/main" id="{4060C8E1-3255-460C-AC38-0F1A673FCBCB}"/>
               </a:ext>
             </a:extLst>
           </p:cNvPr>
@@ -2079,7 +2079,7 @@
           <p:cNvPr id="6" name="">
             <a:extLst xmlns:a="http://schemas.openxmlformats.org/drawingml/2006/main">
               <a:ext uri="{FF2B5EF4-FFF2-40B4-BE49-F238E27FC236}">
-                <a16:creationId xmlns:a16="http://schemas.microsoft.com/office/drawing/2014/main" id="{D637CBB6-DD40-43D0-A6B7-2334DEDEC957}"/>
+                <a16:creationId xmlns:a16="http://schemas.microsoft.com/office/drawing/2014/main" id="{D916C40E-4EEA-470F-8788-9E6F460164C6}"/>
               </a:ext>
             </a:extLst>
           </p:cNvPr>
@@ -2113,7 +2113,7 @@
           <p:cNvPr id="7" name="">
             <a:extLst xmlns:a="http://schemas.openxmlformats.org/drawingml/2006/main">
               <a:ext uri="{FF2B5EF4-FFF2-40B4-BE49-F238E27FC236}">
-                <a16:creationId xmlns:a16="http://schemas.microsoft.com/office/drawing/2014/main" id="{E241BCCB-C5D1-49CE-ABFD-1747C55B339E}"/>
+                <a16:creationId xmlns:a16="http://schemas.microsoft.com/office/drawing/2014/main" id="{C31CA226-A5CF-47B2-9121-94AF4012332B}"/>
               </a:ext>
             </a:extLst>
           </p:cNvPr>
@@ -2170,7 +2170,7 @@
           <p:cNvPr id="8" name="">
             <a:extLst xmlns:a="http://schemas.openxmlformats.org/drawingml/2006/main">
               <a:ext uri="{FF2B5EF4-FFF2-40B4-BE49-F238E27FC236}">
-                <a16:creationId xmlns:a16="http://schemas.microsoft.com/office/drawing/2014/main" id="{D12AE66C-400C-42FF-9AF9-C8BDFB6E134F}"/>
+                <a16:creationId xmlns:a16="http://schemas.microsoft.com/office/drawing/2014/main" id="{2A12B77D-9A48-4B62-9EA4-3129F5BE3DF9}"/>
               </a:ext>
             </a:extLst>
           </p:cNvPr>
@@ -2227,7 +2227,7 @@
           <p:cNvPr id="9" name="">
             <a:extLst xmlns:a="http://schemas.openxmlformats.org/drawingml/2006/main">
               <a:ext uri="{FF2B5EF4-FFF2-40B4-BE49-F238E27FC236}">
-                <a16:creationId xmlns:a16="http://schemas.microsoft.com/office/drawing/2014/main" id="{2BBEE996-927F-46F2-A7D2-9BB6F03AAE63}"/>
+                <a16:creationId xmlns:a16="http://schemas.microsoft.com/office/drawing/2014/main" id="{EE3182C8-AEF3-4992-A70D-D07EA354D2A0}"/>
               </a:ext>
             </a:extLst>
           </p:cNvPr>
@@ -2284,7 +2284,7 @@
           <p:cNvPr id="10" name="">
             <a:extLst xmlns:a="http://schemas.openxmlformats.org/drawingml/2006/main">
               <a:ext uri="{FF2B5EF4-FFF2-40B4-BE49-F238E27FC236}">
-                <a16:creationId xmlns:a16="http://schemas.microsoft.com/office/drawing/2014/main" id="{C5182831-25FF-4C90-8336-7870DF2A89CF}"/>
+                <a16:creationId xmlns:a16="http://schemas.microsoft.com/office/drawing/2014/main" id="{E7743BA8-2961-4C18-8EC2-32BBB7FE9693}"/>
               </a:ext>
             </a:extLst>
           </p:cNvPr>
@@ -2341,7 +2341,7 @@
           <p:cNvPr id="11" name="">
             <a:extLst xmlns:a="http://schemas.openxmlformats.org/drawingml/2006/main">
               <a:ext uri="{FF2B5EF4-FFF2-40B4-BE49-F238E27FC236}">
-                <a16:creationId xmlns:a16="http://schemas.microsoft.com/office/drawing/2014/main" id="{4550E9E2-61EF-4D81-888F-229EE3A0F7EB}"/>
+                <a16:creationId xmlns:a16="http://schemas.microsoft.com/office/drawing/2014/main" id="{3709943B-4ED6-472B-96D2-637FF1915679}"/>
               </a:ext>
             </a:extLst>
           </p:cNvPr>
@@ -2396,7 +2396,7 @@
     </p:spTree>
     <p:extLst>
       <p:ext uri="{BB962C8B-B14F-4D97-AF65-F5344CB8AC3E}">
-        <p14:creationId xmlns:p14="http://schemas.microsoft.com/office/powerpoint/2010/main" val="1445017397"/>
+        <p14:creationId xmlns:p14="http://schemas.microsoft.com/office/powerpoint/2010/main" val="1458003151"/>
       </p:ext>
     </p:extLst>
   </p:cSld>
@@ -2427,7 +2427,7 @@
           <p:cNvPr id="14" name="">
             <a:extLst xmlns:a="http://schemas.openxmlformats.org/drawingml/2006/main">
               <a:ext uri="{FF2B5EF4-FFF2-40B4-BE49-F238E27FC236}">
-                <a16:creationId xmlns:a16="http://schemas.microsoft.com/office/drawing/2014/main" id="{33F28E81-1AEF-48B9-BE56-839FC4773B8F}"/>
+                <a16:creationId xmlns:a16="http://schemas.microsoft.com/office/drawing/2014/main" id="{20236746-9EFA-4E33-905B-782E13B03C15}"/>
               </a:ext>
             </a:extLst>
           </p:cNvPr>
@@ -2459,7 +2459,7 @@
           <p:cNvPr id="2" name="">
             <a:extLst xmlns:a="http://schemas.openxmlformats.org/drawingml/2006/main">
               <a:ext uri="{FF2B5EF4-FFF2-40B4-BE49-F238E27FC236}">
-                <a16:creationId xmlns:a16="http://schemas.microsoft.com/office/drawing/2014/main" id="{895ABDC4-E57C-4752-A1F8-08E3F353D94B}"/>
+                <a16:creationId xmlns:a16="http://schemas.microsoft.com/office/drawing/2014/main" id="{DDE2DC7C-F9DC-4A26-BF88-4B1712B18805}"/>
               </a:ext>
             </a:extLst>
           </p:cNvPr>
@@ -2516,7 +2516,7 @@
           <p:cNvPr id="3" name="">
             <a:extLst xmlns:a="http://schemas.openxmlformats.org/drawingml/2006/main">
               <a:ext uri="{FF2B5EF4-FFF2-40B4-BE49-F238E27FC236}">
-                <a16:creationId xmlns:a16="http://schemas.microsoft.com/office/drawing/2014/main" id="{9805F87A-10E6-42F1-ADF0-BD07FB32E919}"/>
+                <a16:creationId xmlns:a16="http://schemas.microsoft.com/office/drawing/2014/main" id="{6450E6C6-AFDD-4FCE-9E1A-8F214D19732B}"/>
               </a:ext>
             </a:extLst>
           </p:cNvPr>
@@ -2548,7 +2548,7 @@
           <p:cNvPr id="4" name="">
             <a:extLst xmlns:a="http://schemas.openxmlformats.org/drawingml/2006/main">
               <a:ext uri="{FF2B5EF4-FFF2-40B4-BE49-F238E27FC236}">
-                <a16:creationId xmlns:a16="http://schemas.microsoft.com/office/drawing/2014/main" id="{E836C092-2468-4122-874F-8D6816B1EAD2}"/>
+                <a16:creationId xmlns:a16="http://schemas.microsoft.com/office/drawing/2014/main" id="{B12828AA-B4DC-40FD-B4CA-EBC84D91A91A}"/>
               </a:ext>
             </a:extLst>
           </p:cNvPr>
@@ -2605,7 +2605,7 @@
           <p:cNvPr id="5" name="">
             <a:extLst xmlns:a="http://schemas.openxmlformats.org/drawingml/2006/main">
               <a:ext uri="{FF2B5EF4-FFF2-40B4-BE49-F238E27FC236}">
-                <a16:creationId xmlns:a16="http://schemas.microsoft.com/office/drawing/2014/main" id="{2280AA83-B0EF-4115-AC52-0A9A10BE6CD8}"/>
+                <a16:creationId xmlns:a16="http://schemas.microsoft.com/office/drawing/2014/main" id="{DEB2380E-C438-4A90-BA9C-5EE993282C2C}"/>
               </a:ext>
             </a:extLst>
           </p:cNvPr>
@@ -2662,7 +2662,7 @@
           <p:cNvPr id="6" name="">
             <a:extLst xmlns:a="http://schemas.openxmlformats.org/drawingml/2006/main">
               <a:ext uri="{FF2B5EF4-FFF2-40B4-BE49-F238E27FC236}">
-                <a16:creationId xmlns:a16="http://schemas.microsoft.com/office/drawing/2014/main" id="{5662B348-5A74-448C-BC6D-575DD6BBF0E6}"/>
+                <a16:creationId xmlns:a16="http://schemas.microsoft.com/office/drawing/2014/main" id="{B3C55F79-E176-40C0-BC7C-53D03EAD4F74}"/>
               </a:ext>
             </a:extLst>
           </p:cNvPr>
@@ -2719,7 +2719,7 @@
           <p:cNvPr id="7" name="">
             <a:extLst xmlns:a="http://schemas.openxmlformats.org/drawingml/2006/main">
               <a:ext uri="{FF2B5EF4-FFF2-40B4-BE49-F238E27FC236}">
-                <a16:creationId xmlns:a16="http://schemas.microsoft.com/office/drawing/2014/main" id="{E690F825-7CE9-4FE4-A1C6-2618A4DC13C0}"/>
+                <a16:creationId xmlns:a16="http://schemas.microsoft.com/office/drawing/2014/main" id="{676065DE-A73A-4CA0-A48F-5438B8C4ADF7}"/>
               </a:ext>
             </a:extLst>
           </p:cNvPr>
@@ -2751,7 +2751,7 @@
           <p:cNvPr id="8" name="">
             <a:extLst xmlns:a="http://schemas.openxmlformats.org/drawingml/2006/main">
               <a:ext uri="{FF2B5EF4-FFF2-40B4-BE49-F238E27FC236}">
-                <a16:creationId xmlns:a16="http://schemas.microsoft.com/office/drawing/2014/main" id="{5FEE66E1-4A7B-4933-A4F3-D4C284727F13}"/>
+                <a16:creationId xmlns:a16="http://schemas.microsoft.com/office/drawing/2014/main" id="{A6136147-83CB-406C-B0D2-16076AD87302}"/>
               </a:ext>
             </a:extLst>
           </p:cNvPr>
@@ -2808,7 +2808,7 @@
           <p:cNvPr id="9" name="">
             <a:extLst xmlns:a="http://schemas.openxmlformats.org/drawingml/2006/main">
               <a:ext uri="{FF2B5EF4-FFF2-40B4-BE49-F238E27FC236}">
-                <a16:creationId xmlns:a16="http://schemas.microsoft.com/office/drawing/2014/main" id="{802093F3-E56C-41BF-A1C0-0CB710108C94}"/>
+                <a16:creationId xmlns:a16="http://schemas.microsoft.com/office/drawing/2014/main" id="{B11C506C-967E-44AA-A141-199574DC83FC}"/>
               </a:ext>
             </a:extLst>
           </p:cNvPr>
@@ -2865,7 +2865,7 @@
           <p:cNvPr id="10" name="">
             <a:extLst xmlns:a="http://schemas.openxmlformats.org/drawingml/2006/main">
               <a:ext uri="{FF2B5EF4-FFF2-40B4-BE49-F238E27FC236}">
-                <a16:creationId xmlns:a16="http://schemas.microsoft.com/office/drawing/2014/main" id="{880C8F6B-27A3-4D28-B2B8-83B295A9FC33}"/>
+                <a16:creationId xmlns:a16="http://schemas.microsoft.com/office/drawing/2014/main" id="{E40FAD81-F9D0-428C-971A-70E34148093B}"/>
               </a:ext>
             </a:extLst>
           </p:cNvPr>
@@ -2922,7 +2922,7 @@
           <p:cNvPr id="11" name="">
             <a:extLst xmlns:a="http://schemas.openxmlformats.org/drawingml/2006/main">
               <a:ext uri="{FF2B5EF4-FFF2-40B4-BE49-F238E27FC236}">
-                <a16:creationId xmlns:a16="http://schemas.microsoft.com/office/drawing/2014/main" id="{96A675FB-798C-44C4-8F26-B79768EA01B7}"/>
+                <a16:creationId xmlns:a16="http://schemas.microsoft.com/office/drawing/2014/main" id="{B22BBBA0-9830-4DA8-8C7F-CFC12E708A1A}"/>
               </a:ext>
             </a:extLst>
           </p:cNvPr>
@@ -2979,7 +2979,7 @@
           <p:cNvPr id="12" name="">
             <a:extLst xmlns:a="http://schemas.openxmlformats.org/drawingml/2006/main">
               <a:ext uri="{FF2B5EF4-FFF2-40B4-BE49-F238E27FC236}">
-                <a16:creationId xmlns:a16="http://schemas.microsoft.com/office/drawing/2014/main" id="{C5887716-C3F2-42FC-81B5-53F4E0CE785E}"/>
+                <a16:creationId xmlns:a16="http://schemas.microsoft.com/office/drawing/2014/main" id="{5A4C3560-B4E9-41B9-A685-EC6EDC8ECB70}"/>
               </a:ext>
             </a:extLst>
           </p:cNvPr>
@@ -3036,7 +3036,7 @@
           <p:cNvPr id="13" name="">
             <a:extLst xmlns:a="http://schemas.openxmlformats.org/drawingml/2006/main">
               <a:ext uri="{FF2B5EF4-FFF2-40B4-BE49-F238E27FC236}">
-                <a16:creationId xmlns:a16="http://schemas.microsoft.com/office/drawing/2014/main" id="{241658AF-8AEF-4C08-9B4C-89E2A4DD3B2F}"/>
+                <a16:creationId xmlns:a16="http://schemas.microsoft.com/office/drawing/2014/main" id="{8F066125-4F77-476F-81F9-CD335DA829DA}"/>
               </a:ext>
             </a:extLst>
           </p:cNvPr>
@@ -3091,7 +3091,7 @@
     </p:spTree>
     <p:extLst>
       <p:ext uri="{BB962C8B-B14F-4D97-AF65-F5344CB8AC3E}">
-        <p14:creationId xmlns:p14="http://schemas.microsoft.com/office/powerpoint/2010/main" val="2097226921"/>
+        <p14:creationId xmlns:p14="http://schemas.microsoft.com/office/powerpoint/2010/main" val="888675458"/>
       </p:ext>
     </p:extLst>
   </p:cSld>
@@ -3292,7 +3292,7 @@
           <p:cNvPr id="19" name="">
             <a:extLst xmlns:a="http://schemas.openxmlformats.org/drawingml/2006/main">
               <a:ext uri="{FF2B5EF4-FFF2-40B4-BE49-F238E27FC236}">
-                <a16:creationId xmlns:a16="http://schemas.microsoft.com/office/drawing/2014/main" id="{42398745-6F3B-41F6-8D57-7CE4AE5B180B}"/>
+                <a16:creationId xmlns:a16="http://schemas.microsoft.com/office/drawing/2014/main" id="{37AE1823-685D-4E1B-9E51-184EB1E45E26}"/>
               </a:ext>
             </a:extLst>
           </p:cNvPr>
@@ -3324,7 +3324,7 @@
           <p:cNvPr id="2" name="">
             <a:extLst xmlns:a="http://schemas.openxmlformats.org/drawingml/2006/main">
               <a:ext uri="{FF2B5EF4-FFF2-40B4-BE49-F238E27FC236}">
-                <a16:creationId xmlns:a16="http://schemas.microsoft.com/office/drawing/2014/main" id="{5FDB9B08-BF07-4B51-9DCE-FE7CAA1EE2B8}"/>
+                <a16:creationId xmlns:a16="http://schemas.microsoft.com/office/drawing/2014/main" id="{FB302C24-EC40-4240-8652-FD5756AF9867}"/>
               </a:ext>
             </a:extLst>
           </p:cNvPr>
@@ -3381,7 +3381,7 @@
           <p:cNvPr id="3" name="">
             <a:extLst xmlns:a="http://schemas.openxmlformats.org/drawingml/2006/main">
               <a:ext uri="{FF2B5EF4-FFF2-40B4-BE49-F238E27FC236}">
-                <a16:creationId xmlns:a16="http://schemas.microsoft.com/office/drawing/2014/main" id="{CD29F65B-8684-4F63-A933-4FFDE84CDFCE}"/>
+                <a16:creationId xmlns:a16="http://schemas.microsoft.com/office/drawing/2014/main" id="{8062ED95-E868-4145-9A1C-1FAE8F496304}"/>
               </a:ext>
             </a:extLst>
           </p:cNvPr>
@@ -3413,7 +3413,7 @@
           <p:cNvPr id="4" name="">
             <a:extLst xmlns:a="http://schemas.openxmlformats.org/drawingml/2006/main">
               <a:ext uri="{FF2B5EF4-FFF2-40B4-BE49-F238E27FC236}">
-                <a16:creationId xmlns:a16="http://schemas.microsoft.com/office/drawing/2014/main" id="{F459039A-0B89-4741-84F8-9B6083B05F70}"/>
+                <a16:creationId xmlns:a16="http://schemas.microsoft.com/office/drawing/2014/main" id="{BBC72C4B-ABE7-462C-924B-30EE775DD1A8}"/>
               </a:ext>
             </a:extLst>
           </p:cNvPr>
@@ -3470,7 +3470,7 @@
           <p:cNvPr id="5" name="">
             <a:extLst xmlns:a="http://schemas.openxmlformats.org/drawingml/2006/main">
               <a:ext uri="{FF2B5EF4-FFF2-40B4-BE49-F238E27FC236}">
-                <a16:creationId xmlns:a16="http://schemas.microsoft.com/office/drawing/2014/main" id="{9D6B640E-7C40-4CCA-ACE2-F24EE7A1286A}"/>
+                <a16:creationId xmlns:a16="http://schemas.microsoft.com/office/drawing/2014/main" id="{FDD4A289-A195-470D-8DBF-B3DC2CC84CC5}"/>
               </a:ext>
             </a:extLst>
           </p:cNvPr>
@@ -3527,7 +3527,7 @@
           <p:cNvPr id="6" name="">
             <a:extLst xmlns:a="http://schemas.openxmlformats.org/drawingml/2006/main">
               <a:ext uri="{FF2B5EF4-FFF2-40B4-BE49-F238E27FC236}">
-                <a16:creationId xmlns:a16="http://schemas.microsoft.com/office/drawing/2014/main" id="{62387E33-5444-4402-A671-1EF917429B99}"/>
+                <a16:creationId xmlns:a16="http://schemas.microsoft.com/office/drawing/2014/main" id="{D33AAC0D-89FD-4D7A-9B0C-FCDB74FDC56A}"/>
               </a:ext>
             </a:extLst>
           </p:cNvPr>
@@ -3584,7 +3584,7 @@
           <p:cNvPr id="7" name="">
             <a:extLst xmlns:a="http://schemas.openxmlformats.org/drawingml/2006/main">
               <a:ext uri="{FF2B5EF4-FFF2-40B4-BE49-F238E27FC236}">
-                <a16:creationId xmlns:a16="http://schemas.microsoft.com/office/drawing/2014/main" id="{32AEBD80-7546-4625-9047-65145857E585}"/>
+                <a16:creationId xmlns:a16="http://schemas.microsoft.com/office/drawing/2014/main" id="{7EC81DBF-EEE6-43CD-8EF1-E32E26A3031E}"/>
               </a:ext>
             </a:extLst>
           </p:cNvPr>
@@ -3616,7 +3616,7 @@
           <p:cNvPr id="8" name="">
             <a:extLst xmlns:a="http://schemas.openxmlformats.org/drawingml/2006/main">
               <a:ext uri="{FF2B5EF4-FFF2-40B4-BE49-F238E27FC236}">
-                <a16:creationId xmlns:a16="http://schemas.microsoft.com/office/drawing/2014/main" id="{9DAB762F-28E9-4DD4-A2D9-B01887CD7FBC}"/>
+                <a16:creationId xmlns:a16="http://schemas.microsoft.com/office/drawing/2014/main" id="{2D58B707-EA33-447B-BDFC-A9C7254B8EE4}"/>
               </a:ext>
             </a:extLst>
           </p:cNvPr>
@@ -3673,7 +3673,7 @@
           <p:cNvPr id="9" name="">
             <a:extLst xmlns:a="http://schemas.openxmlformats.org/drawingml/2006/main">
               <a:ext uri="{FF2B5EF4-FFF2-40B4-BE49-F238E27FC236}">
-                <a16:creationId xmlns:a16="http://schemas.microsoft.com/office/drawing/2014/main" id="{6FF55C34-38B6-4673-B382-55B9B7C66467}"/>
+                <a16:creationId xmlns:a16="http://schemas.microsoft.com/office/drawing/2014/main" id="{C081FE22-F6A7-43D3-8525-738107D17833}"/>
               </a:ext>
             </a:extLst>
           </p:cNvPr>
@@ -3730,7 +3730,7 @@
           <p:cNvPr id="10" name="">
             <a:extLst xmlns:a="http://schemas.openxmlformats.org/drawingml/2006/main">
               <a:ext uri="{FF2B5EF4-FFF2-40B4-BE49-F238E27FC236}">
-                <a16:creationId xmlns:a16="http://schemas.microsoft.com/office/drawing/2014/main" id="{7291E795-AF7C-46AF-B40A-E4C80858436A}"/>
+                <a16:creationId xmlns:a16="http://schemas.microsoft.com/office/drawing/2014/main" id="{839A12F4-DB7F-4DE2-8D77-8E1E8E2EE37D}"/>
               </a:ext>
             </a:extLst>
           </p:cNvPr>
@@ -3787,7 +3787,7 @@
           <p:cNvPr id="11" name="">
             <a:extLst xmlns:a="http://schemas.openxmlformats.org/drawingml/2006/main">
               <a:ext uri="{FF2B5EF4-FFF2-40B4-BE49-F238E27FC236}">
-                <a16:creationId xmlns:a16="http://schemas.microsoft.com/office/drawing/2014/main" id="{E27C4C32-2672-4AD6-8655-EE433E2DECF9}"/>
+                <a16:creationId xmlns:a16="http://schemas.microsoft.com/office/drawing/2014/main" id="{42B498EA-A5C0-43D0-AC2B-EA04C98EF8B8}"/>
               </a:ext>
             </a:extLst>
           </p:cNvPr>
@@ -3821,7 +3821,7 @@
           <p:cNvPr id="12" name="">
             <a:extLst xmlns:a="http://schemas.openxmlformats.org/drawingml/2006/main">
               <a:ext uri="{FF2B5EF4-FFF2-40B4-BE49-F238E27FC236}">
-                <a16:creationId xmlns:a16="http://schemas.microsoft.com/office/drawing/2014/main" id="{29C78B7B-16DD-4356-B8CA-B93F8052186D}"/>
+                <a16:creationId xmlns:a16="http://schemas.microsoft.com/office/drawing/2014/main" id="{B8416AA5-EB44-4D8C-9F7B-99B9C5AA15E3}"/>
               </a:ext>
             </a:extLst>
           </p:cNvPr>
@@ -3878,7 +3878,7 @@
           <p:cNvPr id="13" name="">
             <a:extLst xmlns:a="http://schemas.openxmlformats.org/drawingml/2006/main">
               <a:ext uri="{FF2B5EF4-FFF2-40B4-BE49-F238E27FC236}">
-                <a16:creationId xmlns:a16="http://schemas.microsoft.com/office/drawing/2014/main" id="{359733AB-ED4C-461D-829E-CF130FE9F7C6}"/>
+                <a16:creationId xmlns:a16="http://schemas.microsoft.com/office/drawing/2014/main" id="{8C4C0529-EEE2-4FA5-89E1-EEB8EBAE164E}"/>
               </a:ext>
             </a:extLst>
           </p:cNvPr>
@@ -3935,7 +3935,7 @@
           <p:cNvPr id="14" name="">
             <a:extLst xmlns:a="http://schemas.openxmlformats.org/drawingml/2006/main">
               <a:ext uri="{FF2B5EF4-FFF2-40B4-BE49-F238E27FC236}">
-                <a16:creationId xmlns:a16="http://schemas.microsoft.com/office/drawing/2014/main" id="{5E081753-1C17-4B29-87B9-89940DDD057A}"/>
+                <a16:creationId xmlns:a16="http://schemas.microsoft.com/office/drawing/2014/main" id="{6DE6642A-E147-4B79-B478-4BA9CC337D13}"/>
               </a:ext>
             </a:extLst>
           </p:cNvPr>
@@ -3992,7 +3992,7 @@
           <p:cNvPr id="15" name="">
             <a:extLst xmlns:a="http://schemas.openxmlformats.org/drawingml/2006/main">
               <a:ext uri="{FF2B5EF4-FFF2-40B4-BE49-F238E27FC236}">
-                <a16:creationId xmlns:a16="http://schemas.microsoft.com/office/drawing/2014/main" id="{6A5FCBF3-AB33-4332-9C1C-25F72369385F}"/>
+                <a16:creationId xmlns:a16="http://schemas.microsoft.com/office/drawing/2014/main" id="{0313A640-E855-4904-83B6-B5E2591A99A6}"/>
               </a:ext>
             </a:extLst>
           </p:cNvPr>
@@ -4026,7 +4026,7 @@
           <p:cNvPr id="16" name="">
             <a:extLst xmlns:a="http://schemas.openxmlformats.org/drawingml/2006/main">
               <a:ext uri="{FF2B5EF4-FFF2-40B4-BE49-F238E27FC236}">
-                <a16:creationId xmlns:a16="http://schemas.microsoft.com/office/drawing/2014/main" id="{6E5F730F-030D-497D-BDDF-D67977C728F1}"/>
+                <a16:creationId xmlns:a16="http://schemas.microsoft.com/office/drawing/2014/main" id="{22C0F790-2897-4273-8C71-C7DDCA0C5FBE}"/>
               </a:ext>
             </a:extLst>
           </p:cNvPr>
@@ -4083,7 +4083,7 @@
           <p:cNvPr id="17" name="">
             <a:extLst xmlns:a="http://schemas.openxmlformats.org/drawingml/2006/main">
               <a:ext uri="{FF2B5EF4-FFF2-40B4-BE49-F238E27FC236}">
-                <a16:creationId xmlns:a16="http://schemas.microsoft.com/office/drawing/2014/main" id="{2636CF97-78DC-403B-96EC-FE6432A6EA97}"/>
+                <a16:creationId xmlns:a16="http://schemas.microsoft.com/office/drawing/2014/main" id="{B90AAE5B-1D10-4114-A236-368436B52A4B}"/>
               </a:ext>
             </a:extLst>
           </p:cNvPr>
@@ -4140,7 +4140,7 @@
           <p:cNvPr id="18" name="">
             <a:extLst xmlns:a="http://schemas.openxmlformats.org/drawingml/2006/main">
               <a:ext uri="{FF2B5EF4-FFF2-40B4-BE49-F238E27FC236}">
-                <a16:creationId xmlns:a16="http://schemas.microsoft.com/office/drawing/2014/main" id="{E85B5694-AD34-45F0-9467-F2BDCB4C9CEC}"/>
+                <a16:creationId xmlns:a16="http://schemas.microsoft.com/office/drawing/2014/main" id="{32860678-C8D7-49DD-B357-0E74F557730E}"/>
               </a:ext>
             </a:extLst>
           </p:cNvPr>
@@ -4195,7 +4195,7 @@
     </p:spTree>
     <p:extLst>
       <p:ext uri="{BB962C8B-B14F-4D97-AF65-F5344CB8AC3E}">
-        <p14:creationId xmlns:p14="http://schemas.microsoft.com/office/powerpoint/2010/main" val="281193634"/>
+        <p14:creationId xmlns:p14="http://schemas.microsoft.com/office/powerpoint/2010/main" val="1536164557"/>
       </p:ext>
     </p:extLst>
   </p:cSld>
@@ -4350,7 +4350,7 @@
           <p:cNvPr id="23" name="">
             <a:extLst xmlns:a="http://schemas.openxmlformats.org/drawingml/2006/main">
               <a:ext uri="{FF2B5EF4-FFF2-40B4-BE49-F238E27FC236}">
-                <a16:creationId xmlns:a16="http://schemas.microsoft.com/office/drawing/2014/main" id="{596A5502-2862-4D15-9F97-A3CDF7B69449}"/>
+                <a16:creationId xmlns:a16="http://schemas.microsoft.com/office/drawing/2014/main" id="{3FD1AE75-780E-4109-86EC-815D874D65A9}"/>
               </a:ext>
             </a:extLst>
           </p:cNvPr>
@@ -4382,7 +4382,7 @@
           <p:cNvPr id="2" name="">
             <a:extLst xmlns:a="http://schemas.openxmlformats.org/drawingml/2006/main">
               <a:ext uri="{FF2B5EF4-FFF2-40B4-BE49-F238E27FC236}">
-                <a16:creationId xmlns:a16="http://schemas.microsoft.com/office/drawing/2014/main" id="{D85FE2E7-883D-4F2B-BDB5-635CEF213E87}"/>
+                <a16:creationId xmlns:a16="http://schemas.microsoft.com/office/drawing/2014/main" id="{1D3A6784-63D6-4924-9042-5FEDE605E812}"/>
               </a:ext>
             </a:extLst>
           </p:cNvPr>
@@ -4439,7 +4439,7 @@
           <p:cNvPr id="3" name="">
             <a:extLst xmlns:a="http://schemas.openxmlformats.org/drawingml/2006/main">
               <a:ext uri="{FF2B5EF4-FFF2-40B4-BE49-F238E27FC236}">
-                <a16:creationId xmlns:a16="http://schemas.microsoft.com/office/drawing/2014/main" id="{7EB9623F-34B1-44B0-88EF-7900B348594E}"/>
+                <a16:creationId xmlns:a16="http://schemas.microsoft.com/office/drawing/2014/main" id="{29203DDC-C2D3-4E3C-B3AB-DCE0D3CE26C8}"/>
               </a:ext>
             </a:extLst>
           </p:cNvPr>
@@ -4471,7 +4471,7 @@
           <p:cNvPr id="4" name="">
             <a:extLst xmlns:a="http://schemas.openxmlformats.org/drawingml/2006/main">
               <a:ext uri="{FF2B5EF4-FFF2-40B4-BE49-F238E27FC236}">
-                <a16:creationId xmlns:a16="http://schemas.microsoft.com/office/drawing/2014/main" id="{A8E9B0B0-6386-4D16-972C-AA05EA405FF5}"/>
+                <a16:creationId xmlns:a16="http://schemas.microsoft.com/office/drawing/2014/main" id="{A9C9CEA5-B41F-45FA-B375-9B87CF760141}"/>
               </a:ext>
             </a:extLst>
           </p:cNvPr>
@@ -4528,7 +4528,7 @@
           <p:cNvPr id="5" name="">
             <a:extLst xmlns:a="http://schemas.openxmlformats.org/drawingml/2006/main">
               <a:ext uri="{FF2B5EF4-FFF2-40B4-BE49-F238E27FC236}">
-                <a16:creationId xmlns:a16="http://schemas.microsoft.com/office/drawing/2014/main" id="{0546C95B-F9B4-459A-8AFB-03A7A575001D}"/>
+                <a16:creationId xmlns:a16="http://schemas.microsoft.com/office/drawing/2014/main" id="{80833FB1-9769-46D4-AC20-90B99243DAA1}"/>
               </a:ext>
             </a:extLst>
           </p:cNvPr>
@@ -4585,7 +4585,7 @@
           <p:cNvPr id="6" name="">
             <a:extLst xmlns:a="http://schemas.openxmlformats.org/drawingml/2006/main">
               <a:ext uri="{FF2B5EF4-FFF2-40B4-BE49-F238E27FC236}">
-                <a16:creationId xmlns:a16="http://schemas.microsoft.com/office/drawing/2014/main" id="{9E380DA9-65D4-4198-B2EA-ADFBB688CF51}"/>
+                <a16:creationId xmlns:a16="http://schemas.microsoft.com/office/drawing/2014/main" id="{05FFBC53-21B7-4C68-A1CA-D6F15DDECA72}"/>
               </a:ext>
             </a:extLst>
           </p:cNvPr>
@@ -4642,7 +4642,7 @@
           <p:cNvPr id="7" name="">
             <a:extLst xmlns:a="http://schemas.openxmlformats.org/drawingml/2006/main">
               <a:ext uri="{FF2B5EF4-FFF2-40B4-BE49-F238E27FC236}">
-                <a16:creationId xmlns:a16="http://schemas.microsoft.com/office/drawing/2014/main" id="{9CE9F495-EE10-4E84-98F8-BEFD706ECE43}"/>
+                <a16:creationId xmlns:a16="http://schemas.microsoft.com/office/drawing/2014/main" id="{A73A57E0-1F67-46B4-A848-924DDBCC3612}"/>
               </a:ext>
             </a:extLst>
           </p:cNvPr>
@@ -4674,7 +4674,7 @@
           <p:cNvPr id="8" name="">
             <a:extLst xmlns:a="http://schemas.openxmlformats.org/drawingml/2006/main">
               <a:ext uri="{FF2B5EF4-FFF2-40B4-BE49-F238E27FC236}">
-                <a16:creationId xmlns:a16="http://schemas.microsoft.com/office/drawing/2014/main" id="{8BA37E5F-323E-44CC-BE77-C5BFFEA3940D}"/>
+                <a16:creationId xmlns:a16="http://schemas.microsoft.com/office/drawing/2014/main" id="{C017B317-B5A3-4299-A81A-9BCE0C4985AE}"/>
               </a:ext>
             </a:extLst>
           </p:cNvPr>
@@ -4731,7 +4731,7 @@
           <p:cNvPr id="9" name="">
             <a:extLst xmlns:a="http://schemas.openxmlformats.org/drawingml/2006/main">
               <a:ext uri="{FF2B5EF4-FFF2-40B4-BE49-F238E27FC236}">
-                <a16:creationId xmlns:a16="http://schemas.microsoft.com/office/drawing/2014/main" id="{3B6667D7-2B00-4735-8604-5554E718C8BB}"/>
+                <a16:creationId xmlns:a16="http://schemas.microsoft.com/office/drawing/2014/main" id="{27F7BBAD-8AD7-4D9C-88D7-71D8A243F0F8}"/>
               </a:ext>
             </a:extLst>
           </p:cNvPr>
@@ -4788,7 +4788,7 @@
           <p:cNvPr id="10" name="">
             <a:extLst xmlns:a="http://schemas.openxmlformats.org/drawingml/2006/main">
               <a:ext uri="{FF2B5EF4-FFF2-40B4-BE49-F238E27FC236}">
-                <a16:creationId xmlns:a16="http://schemas.microsoft.com/office/drawing/2014/main" id="{93894C01-0501-4B1B-BD12-EB0B0E361281}"/>
+                <a16:creationId xmlns:a16="http://schemas.microsoft.com/office/drawing/2014/main" id="{39C108EC-79F2-4D33-9541-DB6A35AD7B73}"/>
               </a:ext>
             </a:extLst>
           </p:cNvPr>
@@ -4822,7 +4822,7 @@
           <p:cNvPr id="11" name="">
             <a:extLst xmlns:a="http://schemas.openxmlformats.org/drawingml/2006/main">
               <a:ext uri="{FF2B5EF4-FFF2-40B4-BE49-F238E27FC236}">
-                <a16:creationId xmlns:a16="http://schemas.microsoft.com/office/drawing/2014/main" id="{DB0F5DA3-5A4D-4AC3-978B-EAABD0D4B3F8}"/>
+                <a16:creationId xmlns:a16="http://schemas.microsoft.com/office/drawing/2014/main" id="{1E95DCAF-DE9D-4C4A-826E-99B896672FA5}"/>
               </a:ext>
             </a:extLst>
           </p:cNvPr>
@@ -4854,7 +4854,7 @@
           <p:cNvPr id="12" name="">
             <a:extLst xmlns:a="http://schemas.openxmlformats.org/drawingml/2006/main">
               <a:ext uri="{FF2B5EF4-FFF2-40B4-BE49-F238E27FC236}">
-                <a16:creationId xmlns:a16="http://schemas.microsoft.com/office/drawing/2014/main" id="{BA746BE2-FA67-4456-920E-654E1D5C3A78}"/>
+                <a16:creationId xmlns:a16="http://schemas.microsoft.com/office/drawing/2014/main" id="{E75A4224-9145-4474-9A38-7AEF2E87CFF6}"/>
               </a:ext>
             </a:extLst>
           </p:cNvPr>
@@ -4911,7 +4911,7 @@
           <p:cNvPr id="13" name="">
             <a:extLst xmlns:a="http://schemas.openxmlformats.org/drawingml/2006/main">
               <a:ext uri="{FF2B5EF4-FFF2-40B4-BE49-F238E27FC236}">
-                <a16:creationId xmlns:a16="http://schemas.microsoft.com/office/drawing/2014/main" id="{7DA3C781-D6FD-443B-8DA3-4DD8A9ECDFAC}"/>
+                <a16:creationId xmlns:a16="http://schemas.microsoft.com/office/drawing/2014/main" id="{A5375C85-A2FD-438E-8C72-00A45D0DAADF}"/>
               </a:ext>
             </a:extLst>
           </p:cNvPr>
@@ -4968,7 +4968,7 @@
           <p:cNvPr id="14" name="">
             <a:extLst xmlns:a="http://schemas.openxmlformats.org/drawingml/2006/main">
               <a:ext uri="{FF2B5EF4-FFF2-40B4-BE49-F238E27FC236}">
-                <a16:creationId xmlns:a16="http://schemas.microsoft.com/office/drawing/2014/main" id="{1D146947-5409-44CD-A4D9-8FAD9AF7DB41}"/>
+                <a16:creationId xmlns:a16="http://schemas.microsoft.com/office/drawing/2014/main" id="{DC4620A7-0866-42D4-A29A-306E3AEE207A}"/>
               </a:ext>
             </a:extLst>
           </p:cNvPr>
@@ -5002,7 +5002,7 @@
           <p:cNvPr id="15" name="">
             <a:extLst xmlns:a="http://schemas.openxmlformats.org/drawingml/2006/main">
               <a:ext uri="{FF2B5EF4-FFF2-40B4-BE49-F238E27FC236}">
-                <a16:creationId xmlns:a16="http://schemas.microsoft.com/office/drawing/2014/main" id="{266B8871-EE10-4EE5-885E-7A1E8765BFAA}"/>
+                <a16:creationId xmlns:a16="http://schemas.microsoft.com/office/drawing/2014/main" id="{AAF8BDAC-6CA8-4B37-A441-8BB84502987A}"/>
               </a:ext>
             </a:extLst>
           </p:cNvPr>
@@ -5034,7 +5034,7 @@
           <p:cNvPr id="16" name="">
             <a:extLst xmlns:a="http://schemas.openxmlformats.org/drawingml/2006/main">
               <a:ext uri="{FF2B5EF4-FFF2-40B4-BE49-F238E27FC236}">
-                <a16:creationId xmlns:a16="http://schemas.microsoft.com/office/drawing/2014/main" id="{3F6751CE-C994-4F18-9B24-74EA8210F901}"/>
+                <a16:creationId xmlns:a16="http://schemas.microsoft.com/office/drawing/2014/main" id="{BC83DABE-B52C-4DB8-96B2-A705E0007CA2}"/>
               </a:ext>
             </a:extLst>
           </p:cNvPr>
@@ -5091,7 +5091,7 @@
           <p:cNvPr id="17" name="">
             <a:extLst xmlns:a="http://schemas.openxmlformats.org/drawingml/2006/main">
               <a:ext uri="{FF2B5EF4-FFF2-40B4-BE49-F238E27FC236}">
-                <a16:creationId xmlns:a16="http://schemas.microsoft.com/office/drawing/2014/main" id="{63D18616-CB40-40C3-A6D2-E4A4B71B21DD}"/>
+                <a16:creationId xmlns:a16="http://schemas.microsoft.com/office/drawing/2014/main" id="{7C38B654-63BE-4198-AFA8-0E5C368B59C1}"/>
               </a:ext>
             </a:extLst>
           </p:cNvPr>
@@ -5148,7 +5148,7 @@
           <p:cNvPr id="18" name="">
             <a:extLst xmlns:a="http://schemas.openxmlformats.org/drawingml/2006/main">
               <a:ext uri="{FF2B5EF4-FFF2-40B4-BE49-F238E27FC236}">
-                <a16:creationId xmlns:a16="http://schemas.microsoft.com/office/drawing/2014/main" id="{86A8A205-7732-49AB-B58C-D2E022A43B91}"/>
+                <a16:creationId xmlns:a16="http://schemas.microsoft.com/office/drawing/2014/main" id="{319A2172-60BD-4A3C-9796-5EAD2D69196B}"/>
               </a:ext>
             </a:extLst>
           </p:cNvPr>
@@ -5182,7 +5182,7 @@
           <p:cNvPr id="19" name="">
             <a:extLst xmlns:a="http://schemas.openxmlformats.org/drawingml/2006/main">
               <a:ext uri="{FF2B5EF4-FFF2-40B4-BE49-F238E27FC236}">
-                <a16:creationId xmlns:a16="http://schemas.microsoft.com/office/drawing/2014/main" id="{6A1CC5A0-E094-4C8C-9275-3243A4FF6589}"/>
+                <a16:creationId xmlns:a16="http://schemas.microsoft.com/office/drawing/2014/main" id="{5F62AA18-A344-4FD4-B655-0C1AC497612D}"/>
               </a:ext>
             </a:extLst>
           </p:cNvPr>
@@ -5214,7 +5214,7 @@
           <p:cNvPr id="20" name="">
             <a:extLst xmlns:a="http://schemas.openxmlformats.org/drawingml/2006/main">
               <a:ext uri="{FF2B5EF4-FFF2-40B4-BE49-F238E27FC236}">
-                <a16:creationId xmlns:a16="http://schemas.microsoft.com/office/drawing/2014/main" id="{D63CA301-B27F-4815-8443-3B376254CBD9}"/>
+                <a16:creationId xmlns:a16="http://schemas.microsoft.com/office/drawing/2014/main" id="{55BAE23B-FAE2-4715-A88C-CDB2956BB39D}"/>
               </a:ext>
             </a:extLst>
           </p:cNvPr>
@@ -5271,7 +5271,7 @@
           <p:cNvPr id="21" name="">
             <a:extLst xmlns:a="http://schemas.openxmlformats.org/drawingml/2006/main">
               <a:ext uri="{FF2B5EF4-FFF2-40B4-BE49-F238E27FC236}">
-                <a16:creationId xmlns:a16="http://schemas.microsoft.com/office/drawing/2014/main" id="{09351B52-D422-479C-AA85-A21C5C4C1330}"/>
+                <a16:creationId xmlns:a16="http://schemas.microsoft.com/office/drawing/2014/main" id="{3C731421-D109-4762-9091-46833732C488}"/>
               </a:ext>
             </a:extLst>
           </p:cNvPr>
@@ -5328,7 +5328,7 @@
           <p:cNvPr id="22" name="">
             <a:extLst xmlns:a="http://schemas.openxmlformats.org/drawingml/2006/main">
               <a:ext uri="{FF2B5EF4-FFF2-40B4-BE49-F238E27FC236}">
-                <a16:creationId xmlns:a16="http://schemas.microsoft.com/office/drawing/2014/main" id="{9C6C561D-81A4-4B20-A887-EF665620D3C5}"/>
+                <a16:creationId xmlns:a16="http://schemas.microsoft.com/office/drawing/2014/main" id="{C2AD8466-A009-48D2-AF9C-86BA6B3AE49F}"/>
               </a:ext>
             </a:extLst>
           </p:cNvPr>
@@ -5383,7 +5383,7 @@
     </p:spTree>
     <p:extLst>
       <p:ext uri="{BB962C8B-B14F-4D97-AF65-F5344CB8AC3E}">
-        <p14:creationId xmlns:p14="http://schemas.microsoft.com/office/powerpoint/2010/main" val="1868246276"/>
+        <p14:creationId xmlns:p14="http://schemas.microsoft.com/office/powerpoint/2010/main" val="1304610116"/>
       </p:ext>
     </p:extLst>
   </p:cSld>
@@ -5584,7 +5584,7 @@
           <p:cNvPr id="23" name="">
             <a:extLst xmlns:a="http://schemas.openxmlformats.org/drawingml/2006/main">
               <a:ext uri="{FF2B5EF4-FFF2-40B4-BE49-F238E27FC236}">
-                <a16:creationId xmlns:a16="http://schemas.microsoft.com/office/drawing/2014/main" id="{4983A5F6-EAF4-4A92-BC18-FD968B847892}"/>
+                <a16:creationId xmlns:a16="http://schemas.microsoft.com/office/drawing/2014/main" id="{44FD49EE-17A2-401C-BBFA-5283D9AC0283}"/>
               </a:ext>
             </a:extLst>
           </p:cNvPr>
@@ -5616,7 +5616,7 @@
           <p:cNvPr id="2" name="">
             <a:extLst xmlns:a="http://schemas.openxmlformats.org/drawingml/2006/main">
               <a:ext uri="{FF2B5EF4-FFF2-40B4-BE49-F238E27FC236}">
-                <a16:creationId xmlns:a16="http://schemas.microsoft.com/office/drawing/2014/main" id="{71B13522-0A30-44AB-860B-905598A0BD29}"/>
+                <a16:creationId xmlns:a16="http://schemas.microsoft.com/office/drawing/2014/main" id="{C2F233AB-8C38-4B7B-B884-FDADADCF4FB2}"/>
               </a:ext>
             </a:extLst>
           </p:cNvPr>
@@ -5673,7 +5673,7 @@
           <p:cNvPr id="3" name="">
             <a:extLst xmlns:a="http://schemas.openxmlformats.org/drawingml/2006/main">
               <a:ext uri="{FF2B5EF4-FFF2-40B4-BE49-F238E27FC236}">
-                <a16:creationId xmlns:a16="http://schemas.microsoft.com/office/drawing/2014/main" id="{4048A583-2040-45CA-BFB6-E979D2B30F5D}"/>
+                <a16:creationId xmlns:a16="http://schemas.microsoft.com/office/drawing/2014/main" id="{F69D0EA0-B2DD-470F-AAAC-32BAD3853C67}"/>
               </a:ext>
             </a:extLst>
           </p:cNvPr>
@@ -5705,7 +5705,7 @@
           <p:cNvPr id="4" name="">
             <a:extLst xmlns:a="http://schemas.openxmlformats.org/drawingml/2006/main">
               <a:ext uri="{FF2B5EF4-FFF2-40B4-BE49-F238E27FC236}">
-                <a16:creationId xmlns:a16="http://schemas.microsoft.com/office/drawing/2014/main" id="{0765C160-4665-4AF7-B8A4-890C2D63B09C}"/>
+                <a16:creationId xmlns:a16="http://schemas.microsoft.com/office/drawing/2014/main" id="{8A664D7B-D666-4EE9-B6DF-7E49FA4CCF2A}"/>
               </a:ext>
             </a:extLst>
           </p:cNvPr>
@@ -5762,7 +5762,7 @@
           <p:cNvPr id="5" name="">
             <a:extLst xmlns:a="http://schemas.openxmlformats.org/drawingml/2006/main">
               <a:ext uri="{FF2B5EF4-FFF2-40B4-BE49-F238E27FC236}">
-                <a16:creationId xmlns:a16="http://schemas.microsoft.com/office/drawing/2014/main" id="{269A2ADD-0EAB-4639-9259-65F1B6474FE9}"/>
+                <a16:creationId xmlns:a16="http://schemas.microsoft.com/office/drawing/2014/main" id="{11A566EC-FA90-4DF0-A61B-F5CB49DC2249}"/>
               </a:ext>
             </a:extLst>
           </p:cNvPr>
@@ -5819,7 +5819,7 @@
           <p:cNvPr id="6" name="">
             <a:extLst xmlns:a="http://schemas.openxmlformats.org/drawingml/2006/main">
               <a:ext uri="{FF2B5EF4-FFF2-40B4-BE49-F238E27FC236}">
-                <a16:creationId xmlns:a16="http://schemas.microsoft.com/office/drawing/2014/main" id="{BB9E515F-8DED-43E8-ADCB-E4BCF610CCE4}"/>
+                <a16:creationId xmlns:a16="http://schemas.microsoft.com/office/drawing/2014/main" id="{A8313856-D25A-496C-9BD7-3819FABBEB47}"/>
               </a:ext>
             </a:extLst>
           </p:cNvPr>
@@ -5876,7 +5876,7 @@
           <p:cNvPr id="7" name="">
             <a:extLst xmlns:a="http://schemas.openxmlformats.org/drawingml/2006/main">
               <a:ext uri="{FF2B5EF4-FFF2-40B4-BE49-F238E27FC236}">
-                <a16:creationId xmlns:a16="http://schemas.microsoft.com/office/drawing/2014/main" id="{F8C41B6D-F01A-4914-B0FB-96B39434F1F6}"/>
+                <a16:creationId xmlns:a16="http://schemas.microsoft.com/office/drawing/2014/main" id="{E5FCF499-56F1-432B-ACA0-33244DF901BD}"/>
               </a:ext>
             </a:extLst>
           </p:cNvPr>
@@ -5908,7 +5908,7 @@
           <p:cNvPr id="8" name="">
             <a:extLst xmlns:a="http://schemas.openxmlformats.org/drawingml/2006/main">
               <a:ext uri="{FF2B5EF4-FFF2-40B4-BE49-F238E27FC236}">
-                <a16:creationId xmlns:a16="http://schemas.microsoft.com/office/drawing/2014/main" id="{53620CCF-B85C-42A4-B8A4-96668E2F1A95}"/>
+                <a16:creationId xmlns:a16="http://schemas.microsoft.com/office/drawing/2014/main" id="{9FAF97C9-D3EC-489D-BDFA-7192B44D6186}"/>
               </a:ext>
             </a:extLst>
           </p:cNvPr>
@@ -5965,7 +5965,7 @@
           <p:cNvPr id="9" name="">
             <a:extLst xmlns:a="http://schemas.openxmlformats.org/drawingml/2006/main">
               <a:ext uri="{FF2B5EF4-FFF2-40B4-BE49-F238E27FC236}">
-                <a16:creationId xmlns:a16="http://schemas.microsoft.com/office/drawing/2014/main" id="{F4BF3B02-F000-4F3D-88D6-096EC3550A75}"/>
+                <a16:creationId xmlns:a16="http://schemas.microsoft.com/office/drawing/2014/main" id="{3A4D9CCF-DBED-4C08-9B96-4B989687E663}"/>
               </a:ext>
             </a:extLst>
           </p:cNvPr>
@@ -6022,7 +6022,7 @@
           <p:cNvPr id="10" name="">
             <a:extLst xmlns:a="http://schemas.openxmlformats.org/drawingml/2006/main">
               <a:ext uri="{FF2B5EF4-FFF2-40B4-BE49-F238E27FC236}">
-                <a16:creationId xmlns:a16="http://schemas.microsoft.com/office/drawing/2014/main" id="{B3406B46-2CCF-43F0-8C64-90F7CE8584CB}"/>
+                <a16:creationId xmlns:a16="http://schemas.microsoft.com/office/drawing/2014/main" id="{980EEEFC-27F6-4C1E-8974-0A445F00F507}"/>
               </a:ext>
             </a:extLst>
           </p:cNvPr>
@@ -6056,7 +6056,7 @@
           <p:cNvPr id="11" name="">
             <a:extLst xmlns:a="http://schemas.openxmlformats.org/drawingml/2006/main">
               <a:ext uri="{FF2B5EF4-FFF2-40B4-BE49-F238E27FC236}">
-                <a16:creationId xmlns:a16="http://schemas.microsoft.com/office/drawing/2014/main" id="{B90CE673-CD9E-4B4E-BB89-353A0E7726BC}"/>
+                <a16:creationId xmlns:a16="http://schemas.microsoft.com/office/drawing/2014/main" id="{B19F3A2B-9556-4C9E-A1DB-11053733CE5A}"/>
               </a:ext>
             </a:extLst>
           </p:cNvPr>
@@ -6088,7 +6088,7 @@
           <p:cNvPr id="12" name="">
             <a:extLst xmlns:a="http://schemas.openxmlformats.org/drawingml/2006/main">
               <a:ext uri="{FF2B5EF4-FFF2-40B4-BE49-F238E27FC236}">
-                <a16:creationId xmlns:a16="http://schemas.microsoft.com/office/drawing/2014/main" id="{B3DD8ECC-6052-47E0-BDE8-282BE6D130D9}"/>
+                <a16:creationId xmlns:a16="http://schemas.microsoft.com/office/drawing/2014/main" id="{5C788792-0966-48F7-B311-2DBD0F28D6EE}"/>
               </a:ext>
             </a:extLst>
           </p:cNvPr>
@@ -6145,7 +6145,7 @@
           <p:cNvPr id="13" name="">
             <a:extLst xmlns:a="http://schemas.openxmlformats.org/drawingml/2006/main">
               <a:ext uri="{FF2B5EF4-FFF2-40B4-BE49-F238E27FC236}">
-                <a16:creationId xmlns:a16="http://schemas.microsoft.com/office/drawing/2014/main" id="{03357DB9-7F1F-4ACA-B6F0-AEEE1ED49BF1}"/>
+                <a16:creationId xmlns:a16="http://schemas.microsoft.com/office/drawing/2014/main" id="{3302F755-AAE5-4ED3-B2EE-C0CAE78E68D3}"/>
               </a:ext>
             </a:extLst>
           </p:cNvPr>
@@ -6202,7 +6202,7 @@
           <p:cNvPr id="14" name="">
             <a:extLst xmlns:a="http://schemas.openxmlformats.org/drawingml/2006/main">
               <a:ext uri="{FF2B5EF4-FFF2-40B4-BE49-F238E27FC236}">
-                <a16:creationId xmlns:a16="http://schemas.microsoft.com/office/drawing/2014/main" id="{9286F514-1CEB-4940-8FCA-90A1F27083FE}"/>
+                <a16:creationId xmlns:a16="http://schemas.microsoft.com/office/drawing/2014/main" id="{34D66E87-C997-478A-A326-91100315920A}"/>
               </a:ext>
             </a:extLst>
           </p:cNvPr>
@@ -6236,7 +6236,7 @@
           <p:cNvPr id="15" name="">
             <a:extLst xmlns:a="http://schemas.openxmlformats.org/drawingml/2006/main">
               <a:ext uri="{FF2B5EF4-FFF2-40B4-BE49-F238E27FC236}">
-                <a16:creationId xmlns:a16="http://schemas.microsoft.com/office/drawing/2014/main" id="{BEFD2CD9-D3FC-474F-9E25-DD8399554841}"/>
+                <a16:creationId xmlns:a16="http://schemas.microsoft.com/office/drawing/2014/main" id="{B0575DFC-6DAF-45A2-8476-629671FF695A}"/>
               </a:ext>
             </a:extLst>
           </p:cNvPr>
@@ -6268,7 +6268,7 @@
           <p:cNvPr id="16" name="">
             <a:extLst xmlns:a="http://schemas.openxmlformats.org/drawingml/2006/main">
               <a:ext uri="{FF2B5EF4-FFF2-40B4-BE49-F238E27FC236}">
-                <a16:creationId xmlns:a16="http://schemas.microsoft.com/office/drawing/2014/main" id="{01867F27-C10E-48EF-98B4-D89514FBD263}"/>
+                <a16:creationId xmlns:a16="http://schemas.microsoft.com/office/drawing/2014/main" id="{8A96ADD6-4372-4726-BDAF-28AAEBDBC28E}"/>
               </a:ext>
             </a:extLst>
           </p:cNvPr>
@@ -6325,7 +6325,7 @@
           <p:cNvPr id="17" name="">
             <a:extLst xmlns:a="http://schemas.openxmlformats.org/drawingml/2006/main">
               <a:ext uri="{FF2B5EF4-FFF2-40B4-BE49-F238E27FC236}">
-                <a16:creationId xmlns:a16="http://schemas.microsoft.com/office/drawing/2014/main" id="{91BF177B-9B39-43A0-92C2-18AEFB338CDA}"/>
+                <a16:creationId xmlns:a16="http://schemas.microsoft.com/office/drawing/2014/main" id="{B7A01F4C-1D69-4F53-B107-D80829E412E7}"/>
               </a:ext>
             </a:extLst>
           </p:cNvPr>
@@ -6382,7 +6382,7 @@
           <p:cNvPr id="18" name="">
             <a:extLst xmlns:a="http://schemas.openxmlformats.org/drawingml/2006/main">
               <a:ext uri="{FF2B5EF4-FFF2-40B4-BE49-F238E27FC236}">
-                <a16:creationId xmlns:a16="http://schemas.microsoft.com/office/drawing/2014/main" id="{C1F9B055-C6E6-4B59-B4AD-9AA8DBF8BB6C}"/>
+                <a16:creationId xmlns:a16="http://schemas.microsoft.com/office/drawing/2014/main" id="{15A76695-507C-4D30-9D62-B818E643B1A2}"/>
               </a:ext>
             </a:extLst>
           </p:cNvPr>
@@ -6416,7 +6416,7 @@
           <p:cNvPr id="19" name="">
             <a:extLst xmlns:a="http://schemas.openxmlformats.org/drawingml/2006/main">
               <a:ext uri="{FF2B5EF4-FFF2-40B4-BE49-F238E27FC236}">
-                <a16:creationId xmlns:a16="http://schemas.microsoft.com/office/drawing/2014/main" id="{583A2904-8661-45B3-BBB9-BE353DC7508A}"/>
+                <a16:creationId xmlns:a16="http://schemas.microsoft.com/office/drawing/2014/main" id="{28BA2F9A-C4C4-47D3-8276-BDA917FFB4AD}"/>
               </a:ext>
             </a:extLst>
           </p:cNvPr>
@@ -6448,7 +6448,7 @@
           <p:cNvPr id="20" name="">
             <a:extLst xmlns:a="http://schemas.openxmlformats.org/drawingml/2006/main">
               <a:ext uri="{FF2B5EF4-FFF2-40B4-BE49-F238E27FC236}">
-                <a16:creationId xmlns:a16="http://schemas.microsoft.com/office/drawing/2014/main" id="{FE2A0564-2593-42AA-BFBE-8D779F8AF8AF}"/>
+                <a16:creationId xmlns:a16="http://schemas.microsoft.com/office/drawing/2014/main" id="{C318E7F6-86E7-4507-BF9E-9835F91A0AAE}"/>
               </a:ext>
             </a:extLst>
           </p:cNvPr>
@@ -6505,7 +6505,7 @@
           <p:cNvPr id="21" name="">
             <a:extLst xmlns:a="http://schemas.openxmlformats.org/drawingml/2006/main">
               <a:ext uri="{FF2B5EF4-FFF2-40B4-BE49-F238E27FC236}">
-                <a16:creationId xmlns:a16="http://schemas.microsoft.com/office/drawing/2014/main" id="{C8289D1F-663B-4E2D-8AF5-059B64793C1A}"/>
+                <a16:creationId xmlns:a16="http://schemas.microsoft.com/office/drawing/2014/main" id="{F816A7C8-8BEF-4ABC-BB32-2AC34366CD10}"/>
               </a:ext>
             </a:extLst>
           </p:cNvPr>
@@ -6562,7 +6562,7 @@
           <p:cNvPr id="22" name="">
             <a:extLst xmlns:a="http://schemas.openxmlformats.org/drawingml/2006/main">
               <a:ext uri="{FF2B5EF4-FFF2-40B4-BE49-F238E27FC236}">
-                <a16:creationId xmlns:a16="http://schemas.microsoft.com/office/drawing/2014/main" id="{C3CDD872-62FE-47FC-BA0E-DE5C1AB323E5}"/>
+                <a16:creationId xmlns:a16="http://schemas.microsoft.com/office/drawing/2014/main" id="{C2CEE27E-113F-4418-B5BF-A1A3448B4484}"/>
               </a:ext>
             </a:extLst>
           </p:cNvPr>
@@ -6617,7 +6617,7 @@
     </p:spTree>
     <p:extLst>
       <p:ext uri="{BB962C8B-B14F-4D97-AF65-F5344CB8AC3E}">
-        <p14:creationId xmlns:p14="http://schemas.microsoft.com/office/powerpoint/2010/main" val="1424370290"/>
+        <p14:creationId xmlns:p14="http://schemas.microsoft.com/office/powerpoint/2010/main" val="1977034098"/>
       </p:ext>
     </p:extLst>
   </p:cSld>
@@ -6818,7 +6818,7 @@
           <p:cNvPr id="16" name="">
             <a:extLst xmlns:a="http://schemas.openxmlformats.org/drawingml/2006/main">
               <a:ext uri="{FF2B5EF4-FFF2-40B4-BE49-F238E27FC236}">
-                <a16:creationId xmlns:a16="http://schemas.microsoft.com/office/drawing/2014/main" id="{A03D45B3-BEDF-448B-BE47-4B6FC8AA9F59}"/>
+                <a16:creationId xmlns:a16="http://schemas.microsoft.com/office/drawing/2014/main" id="{2D1452F1-3F90-4B8D-8CC0-97FB2CCA4270}"/>
               </a:ext>
             </a:extLst>
           </p:cNvPr>
@@ -6850,7 +6850,7 @@
           <p:cNvPr id="2" name="">
             <a:extLst xmlns:a="http://schemas.openxmlformats.org/drawingml/2006/main">
               <a:ext uri="{FF2B5EF4-FFF2-40B4-BE49-F238E27FC236}">
-                <a16:creationId xmlns:a16="http://schemas.microsoft.com/office/drawing/2014/main" id="{97A5F30D-6801-4CEC-91D4-BB9B7CD6B1D3}"/>
+                <a16:creationId xmlns:a16="http://schemas.microsoft.com/office/drawing/2014/main" id="{00CC1255-9C43-4315-AFA8-4B07F0A4B16C}"/>
               </a:ext>
             </a:extLst>
           </p:cNvPr>
@@ -6907,7 +6907,7 @@
           <p:cNvPr id="3" name="">
             <a:extLst xmlns:a="http://schemas.openxmlformats.org/drawingml/2006/main">
               <a:ext uri="{FF2B5EF4-FFF2-40B4-BE49-F238E27FC236}">
-                <a16:creationId xmlns:a16="http://schemas.microsoft.com/office/drawing/2014/main" id="{A2D61248-38B1-454E-829F-0BDC73344959}"/>
+                <a16:creationId xmlns:a16="http://schemas.microsoft.com/office/drawing/2014/main" id="{F770EB9B-D7ED-48B2-88D2-6577C524A556}"/>
               </a:ext>
             </a:extLst>
           </p:cNvPr>
@@ -6939,7 +6939,7 @@
           <p:cNvPr id="4" name="">
             <a:extLst xmlns:a="http://schemas.openxmlformats.org/drawingml/2006/main">
               <a:ext uri="{FF2B5EF4-FFF2-40B4-BE49-F238E27FC236}">
-                <a16:creationId xmlns:a16="http://schemas.microsoft.com/office/drawing/2014/main" id="{FC90BD80-E8F1-4622-A661-D6A565A53489}"/>
+                <a16:creationId xmlns:a16="http://schemas.microsoft.com/office/drawing/2014/main" id="{2A291AF2-F1C1-4AA0-9DF9-FB8F049617BD}"/>
               </a:ext>
             </a:extLst>
           </p:cNvPr>
@@ -6996,7 +6996,7 @@
           <p:cNvPr id="5" name="">
             <a:extLst xmlns:a="http://schemas.openxmlformats.org/drawingml/2006/main">
               <a:ext uri="{FF2B5EF4-FFF2-40B4-BE49-F238E27FC236}">
-                <a16:creationId xmlns:a16="http://schemas.microsoft.com/office/drawing/2014/main" id="{6884112B-9D9E-4E07-985D-ED2042606A69}"/>
+                <a16:creationId xmlns:a16="http://schemas.microsoft.com/office/drawing/2014/main" id="{E704AAE4-FC82-4A90-9DB6-D343C9B20C20}"/>
               </a:ext>
             </a:extLst>
           </p:cNvPr>
@@ -7053,7 +7053,7 @@
           <p:cNvPr id="6" name="">
             <a:extLst xmlns:a="http://schemas.openxmlformats.org/drawingml/2006/main">
               <a:ext uri="{FF2B5EF4-FFF2-40B4-BE49-F238E27FC236}">
-                <a16:creationId xmlns:a16="http://schemas.microsoft.com/office/drawing/2014/main" id="{2ADA6BEE-B8B3-4E1E-8F24-5383B1B3F188}"/>
+                <a16:creationId xmlns:a16="http://schemas.microsoft.com/office/drawing/2014/main" id="{C36C8D4A-B420-44D4-95F2-3E51C753EB81}"/>
               </a:ext>
             </a:extLst>
           </p:cNvPr>
@@ -7110,7 +7110,7 @@
           <p:cNvPr id="7" name="">
             <a:extLst xmlns:a="http://schemas.openxmlformats.org/drawingml/2006/main">
               <a:ext uri="{FF2B5EF4-FFF2-40B4-BE49-F238E27FC236}">
-                <a16:creationId xmlns:a16="http://schemas.microsoft.com/office/drawing/2014/main" id="{395A5E8F-B9BE-4990-87F1-8547406085CE}"/>
+                <a16:creationId xmlns:a16="http://schemas.microsoft.com/office/drawing/2014/main" id="{7D9CBD0E-B732-49B9-9E46-CFEBF4B3F0FA}"/>
               </a:ext>
             </a:extLst>
           </p:cNvPr>
@@ -7142,7 +7142,7 @@
           <p:cNvPr id="8" name="">
             <a:extLst xmlns:a="http://schemas.openxmlformats.org/drawingml/2006/main">
               <a:ext uri="{FF2B5EF4-FFF2-40B4-BE49-F238E27FC236}">
-                <a16:creationId xmlns:a16="http://schemas.microsoft.com/office/drawing/2014/main" id="{B43EEB69-0960-4DB9-959A-FEFD97C7B608}"/>
+                <a16:creationId xmlns:a16="http://schemas.microsoft.com/office/drawing/2014/main" id="{D345D69B-0541-48ED-9C72-6CA0012A1508}"/>
               </a:ext>
             </a:extLst>
           </p:cNvPr>
@@ -7199,7 +7199,7 @@
           <p:cNvPr id="9" name="">
             <a:extLst xmlns:a="http://schemas.openxmlformats.org/drawingml/2006/main">
               <a:ext uri="{FF2B5EF4-FFF2-40B4-BE49-F238E27FC236}">
-                <a16:creationId xmlns:a16="http://schemas.microsoft.com/office/drawing/2014/main" id="{7221D959-DB81-4C1A-99D8-C75E775D86C9}"/>
+                <a16:creationId xmlns:a16="http://schemas.microsoft.com/office/drawing/2014/main" id="{07106516-4FDB-4191-874C-334DD693611D}"/>
               </a:ext>
             </a:extLst>
           </p:cNvPr>
@@ -7256,7 +7256,7 @@
           <p:cNvPr id="10" name="">
             <a:extLst xmlns:a="http://schemas.openxmlformats.org/drawingml/2006/main">
               <a:ext uri="{FF2B5EF4-FFF2-40B4-BE49-F238E27FC236}">
-                <a16:creationId xmlns:a16="http://schemas.microsoft.com/office/drawing/2014/main" id="{1F6F4941-5F31-4DD4-9979-0FC4C884886B}"/>
+                <a16:creationId xmlns:a16="http://schemas.microsoft.com/office/drawing/2014/main" id="{1D2EC709-AA8F-4398-A935-AFEAAAD9EC70}"/>
               </a:ext>
             </a:extLst>
           </p:cNvPr>
@@ -7313,7 +7313,7 @@
           <p:cNvPr id="11" name="">
             <a:extLst xmlns:a="http://schemas.openxmlformats.org/drawingml/2006/main">
               <a:ext uri="{FF2B5EF4-FFF2-40B4-BE49-F238E27FC236}">
-                <a16:creationId xmlns:a16="http://schemas.microsoft.com/office/drawing/2014/main" id="{2A28AE1E-B5F9-40CC-B783-71BEEF5AFD7D}"/>
+                <a16:creationId xmlns:a16="http://schemas.microsoft.com/office/drawing/2014/main" id="{7AE73F01-257A-4ABC-9284-69EE9D13CD35}"/>
               </a:ext>
             </a:extLst>
           </p:cNvPr>
@@ -7345,7 +7345,7 @@
           <p:cNvPr id="12" name="">
             <a:extLst xmlns:a="http://schemas.openxmlformats.org/drawingml/2006/main">
               <a:ext uri="{FF2B5EF4-FFF2-40B4-BE49-F238E27FC236}">
-                <a16:creationId xmlns:a16="http://schemas.microsoft.com/office/drawing/2014/main" id="{36AE28FF-B9D4-476E-9947-0398BF1BB2DE}"/>
+                <a16:creationId xmlns:a16="http://schemas.microsoft.com/office/drawing/2014/main" id="{DBDD7E5C-461F-4D6A-926B-65820CC8E04D}"/>
               </a:ext>
             </a:extLst>
           </p:cNvPr>
@@ -7402,7 +7402,7 @@
           <p:cNvPr id="13" name="">
             <a:extLst xmlns:a="http://schemas.openxmlformats.org/drawingml/2006/main">
               <a:ext uri="{FF2B5EF4-FFF2-40B4-BE49-F238E27FC236}">
-                <a16:creationId xmlns:a16="http://schemas.microsoft.com/office/drawing/2014/main" id="{21004DBF-F22E-4ECC-9081-861B36A9635D}"/>
+                <a16:creationId xmlns:a16="http://schemas.microsoft.com/office/drawing/2014/main" id="{196BFA82-5E43-4599-86F2-4B9DDA49E4E3}"/>
               </a:ext>
             </a:extLst>
           </p:cNvPr>
@@ -7459,7 +7459,7 @@
           <p:cNvPr id="14" name="">
             <a:extLst xmlns:a="http://schemas.openxmlformats.org/drawingml/2006/main">
               <a:ext uri="{FF2B5EF4-FFF2-40B4-BE49-F238E27FC236}">
-                <a16:creationId xmlns:a16="http://schemas.microsoft.com/office/drawing/2014/main" id="{D6B9C1C8-73D5-4840-9C33-FC4077C97404}"/>
+                <a16:creationId xmlns:a16="http://schemas.microsoft.com/office/drawing/2014/main" id="{939E5C3F-F611-4416-9A74-FE9792D207B9}"/>
               </a:ext>
             </a:extLst>
           </p:cNvPr>
@@ -7516,7 +7516,7 @@
           <p:cNvPr id="15" name="">
             <a:extLst xmlns:a="http://schemas.openxmlformats.org/drawingml/2006/main">
               <a:ext uri="{FF2B5EF4-FFF2-40B4-BE49-F238E27FC236}">
-                <a16:creationId xmlns:a16="http://schemas.microsoft.com/office/drawing/2014/main" id="{CC9F5474-D0DF-4410-A753-517B62730C74}"/>
+                <a16:creationId xmlns:a16="http://schemas.microsoft.com/office/drawing/2014/main" id="{5F7354B9-D836-49BB-BE6B-A31FF4A0F540}"/>
               </a:ext>
             </a:extLst>
           </p:cNvPr>
@@ -7571,7 +7571,7 @@
     </p:spTree>
     <p:extLst>
       <p:ext uri="{BB962C8B-B14F-4D97-AF65-F5344CB8AC3E}">
-        <p14:creationId xmlns:p14="http://schemas.microsoft.com/office/powerpoint/2010/main" val="803813209"/>
+        <p14:creationId xmlns:p14="http://schemas.microsoft.com/office/powerpoint/2010/main" val="419545460"/>
       </p:ext>
     </p:extLst>
   </p:cSld>
@@ -7772,7 +7772,7 @@
           <p:cNvPr id="23" name="">
             <a:extLst xmlns:a="http://schemas.openxmlformats.org/drawingml/2006/main">
               <a:ext uri="{FF2B5EF4-FFF2-40B4-BE49-F238E27FC236}">
-                <a16:creationId xmlns:a16="http://schemas.microsoft.com/office/drawing/2014/main" id="{6E362557-60CA-4B01-9BB8-36556BC14C5B}"/>
+                <a16:creationId xmlns:a16="http://schemas.microsoft.com/office/drawing/2014/main" id="{2B32D003-6F1D-4415-B674-7B86C61469DC}"/>
               </a:ext>
             </a:extLst>
           </p:cNvPr>
@@ -7804,7 +7804,7 @@
           <p:cNvPr id="2" name="">
             <a:extLst xmlns:a="http://schemas.openxmlformats.org/drawingml/2006/main">
               <a:ext uri="{FF2B5EF4-FFF2-40B4-BE49-F238E27FC236}">
-                <a16:creationId xmlns:a16="http://schemas.microsoft.com/office/drawing/2014/main" id="{9EF27CF0-E5E4-4D03-B0DA-C49CB4BC7B69}"/>
+                <a16:creationId xmlns:a16="http://schemas.microsoft.com/office/drawing/2014/main" id="{E5E2677D-350B-41C8-A0B3-A2E62DE9DF1C}"/>
               </a:ext>
             </a:extLst>
           </p:cNvPr>
@@ -7861,7 +7861,7 @@
           <p:cNvPr id="3" name="">
             <a:extLst xmlns:a="http://schemas.openxmlformats.org/drawingml/2006/main">
               <a:ext uri="{FF2B5EF4-FFF2-40B4-BE49-F238E27FC236}">
-                <a16:creationId xmlns:a16="http://schemas.microsoft.com/office/drawing/2014/main" id="{1C28F218-9DF9-4466-A248-92C840B942D2}"/>
+                <a16:creationId xmlns:a16="http://schemas.microsoft.com/office/drawing/2014/main" id="{62533316-77F6-4588-9FA1-58313AA6093F}"/>
               </a:ext>
             </a:extLst>
           </p:cNvPr>
@@ -7893,7 +7893,7 @@
           <p:cNvPr id="4" name="">
             <a:extLst xmlns:a="http://schemas.openxmlformats.org/drawingml/2006/main">
               <a:ext uri="{FF2B5EF4-FFF2-40B4-BE49-F238E27FC236}">
-                <a16:creationId xmlns:a16="http://schemas.microsoft.com/office/drawing/2014/main" id="{B6589817-766F-4396-AC94-3B17B503A524}"/>
+                <a16:creationId xmlns:a16="http://schemas.microsoft.com/office/drawing/2014/main" id="{A75F45FF-BD1B-4CB1-A035-D67E8B815E6A}"/>
               </a:ext>
             </a:extLst>
           </p:cNvPr>
@@ -7950,7 +7950,7 @@
           <p:cNvPr id="5" name="">
             <a:extLst xmlns:a="http://schemas.openxmlformats.org/drawingml/2006/main">
               <a:ext uri="{FF2B5EF4-FFF2-40B4-BE49-F238E27FC236}">
-                <a16:creationId xmlns:a16="http://schemas.microsoft.com/office/drawing/2014/main" id="{05450143-E0CD-454B-B1A8-3284A65BD532}"/>
+                <a16:creationId xmlns:a16="http://schemas.microsoft.com/office/drawing/2014/main" id="{E0B63E92-3351-4B09-ABE6-8A378589F479}"/>
               </a:ext>
             </a:extLst>
           </p:cNvPr>
@@ -8007,7 +8007,7 @@
           <p:cNvPr id="6" name="">
             <a:extLst xmlns:a="http://schemas.openxmlformats.org/drawingml/2006/main">
               <a:ext uri="{FF2B5EF4-FFF2-40B4-BE49-F238E27FC236}">
-                <a16:creationId xmlns:a16="http://schemas.microsoft.com/office/drawing/2014/main" id="{04F2DC14-1804-48F5-8739-0F0F98ADFFD0}"/>
+                <a16:creationId xmlns:a16="http://schemas.microsoft.com/office/drawing/2014/main" id="{ADF26821-29A4-4F87-AE3D-D24641BC38FC}"/>
               </a:ext>
             </a:extLst>
           </p:cNvPr>
@@ -8064,7 +8064,7 @@
           <p:cNvPr id="7" name="">
             <a:extLst xmlns:a="http://schemas.openxmlformats.org/drawingml/2006/main">
               <a:ext uri="{FF2B5EF4-FFF2-40B4-BE49-F238E27FC236}">
-                <a16:creationId xmlns:a16="http://schemas.microsoft.com/office/drawing/2014/main" id="{26E403DB-57B7-4723-AD93-EE99DBF0B373}"/>
+                <a16:creationId xmlns:a16="http://schemas.microsoft.com/office/drawing/2014/main" id="{7CAF2978-8371-492B-8174-F36E06FC5DF4}"/>
               </a:ext>
             </a:extLst>
           </p:cNvPr>
@@ -8096,7 +8096,7 @@
           <p:cNvPr id="8" name="">
             <a:extLst xmlns:a="http://schemas.openxmlformats.org/drawingml/2006/main">
               <a:ext uri="{FF2B5EF4-FFF2-40B4-BE49-F238E27FC236}">
-                <a16:creationId xmlns:a16="http://schemas.microsoft.com/office/drawing/2014/main" id="{01219DD3-D468-43FB-8602-ECAD800186FE}"/>
+                <a16:creationId xmlns:a16="http://schemas.microsoft.com/office/drawing/2014/main" id="{24B19148-1676-45B9-8D37-B1E7EBF61FFD}"/>
               </a:ext>
             </a:extLst>
           </p:cNvPr>
@@ -8153,7 +8153,7 @@
           <p:cNvPr id="9" name="">
             <a:extLst xmlns:a="http://schemas.openxmlformats.org/drawingml/2006/main">
               <a:ext uri="{FF2B5EF4-FFF2-40B4-BE49-F238E27FC236}">
-                <a16:creationId xmlns:a16="http://schemas.microsoft.com/office/drawing/2014/main" id="{A78611BF-9874-4796-A81B-F62F207C2E77}"/>
+                <a16:creationId xmlns:a16="http://schemas.microsoft.com/office/drawing/2014/main" id="{3183AF12-7361-4EDE-A3F0-8850B21E9DC8}"/>
               </a:ext>
             </a:extLst>
           </p:cNvPr>
@@ -8210,19 +8210,19 @@
           <p:cNvPr id="10" name="">
             <a:extLst xmlns:a="http://schemas.openxmlformats.org/drawingml/2006/main">
               <a:ext uri="{FF2B5EF4-FFF2-40B4-BE49-F238E27FC236}">
-                <a16:creationId xmlns:a16="http://schemas.microsoft.com/office/drawing/2014/main" id="{BD475122-7FCE-4C78-BFA2-13C33A665523}"/>
-              </a:ext>
-            </a:extLst>
-          </p:cNvPr>
-          <p:cNvSpPr>
-            <a:spLocks xmlns:a="http://schemas.openxmlformats.org/drawingml/2006/main" noGrp="1"/>
-          </p:cNvSpPr>
-          <p:nvPr/>
-        </p:nvSpPr>
-        <p:spPr>
-          <a:xfrm xmlns:a="http://schemas.openxmlformats.org/drawingml/2006/main">
-            <a:off x="914400" y="1257300"/>
-            <a:ext cx="10363200" cy="781050"/>
+                <a16:creationId xmlns:a16="http://schemas.microsoft.com/office/drawing/2014/main" id="{B0BD7E13-DD8B-482E-BC8D-40EEB5895882}"/>
+              </a:ext>
+            </a:extLst>
+          </p:cNvPr>
+          <p:cNvSpPr>
+            <a:spLocks xmlns:a="http://schemas.openxmlformats.org/drawingml/2006/main" noGrp="1"/>
+          </p:cNvSpPr>
+          <p:nvPr/>
+        </p:nvSpPr>
+        <p:spPr>
+          <a:xfrm xmlns:a="http://schemas.openxmlformats.org/drawingml/2006/main">
+            <a:off x="857250" y="1219200"/>
+            <a:ext cx="10477500" cy="742950"/>
           </a:xfrm>
           <a:prstGeom xmlns:a="http://schemas.openxmlformats.org/drawingml/2006/main" prst="rect">
             <a:avLst/>
@@ -8239,7 +8239,7 @@
           <a:lstStyle xmlns:a="http://schemas.openxmlformats.org/drawingml/2006/main"/>
           <a:p xmlns:a="http://schemas.openxmlformats.org/drawingml/2006/main">
             <a:pPr algn="ctr">
-              <a:defRPr sz="2175" b="1">
+              <a:defRPr sz="2100" b="1">
                 <a:solidFill>
                   <a:srgbClr val="17253A"/>
                 </a:solidFill>
@@ -8249,7 +8249,7 @@
               </a:defRPr>
             </a:pPr>
             <a:r>
-              <a:rPr sz="2175" b="1">
+              <a:rPr sz="2100" b="1">
                 <a:solidFill>
                   <a:srgbClr val="17253A"/>
                 </a:solidFill>
@@ -8267,28 +8267,30 @@
           <p:cNvPr id="11" name="">
             <a:extLst xmlns:a="http://schemas.openxmlformats.org/drawingml/2006/main">
               <a:ext uri="{FF2B5EF4-FFF2-40B4-BE49-F238E27FC236}">
-                <a16:creationId xmlns:a16="http://schemas.microsoft.com/office/drawing/2014/main" id="{3A7FF091-81CA-48A8-823E-C432C421549D}"/>
-              </a:ext>
-            </a:extLst>
-          </p:cNvPr>
-          <p:cNvSpPr>
-            <a:spLocks xmlns:a="http://schemas.openxmlformats.org/drawingml/2006/main" noGrp="1"/>
-          </p:cNvSpPr>
-          <p:nvPr/>
-        </p:nvSpPr>
-        <p:spPr>
-          <a:xfrm xmlns:a="http://schemas.openxmlformats.org/drawingml/2006/main">
-            <a:off x="1000125" y="2247900"/>
-            <a:ext cx="476250" cy="476250"/>
-          </a:xfrm>
-          <a:prstGeom xmlns:a="http://schemas.openxmlformats.org/drawingml/2006/main" prst="ellipse">
+                <a16:creationId xmlns:a16="http://schemas.microsoft.com/office/drawing/2014/main" id="{E97A2D41-6D23-433E-A1C7-1B6513292BC6}"/>
+              </a:ext>
+            </a:extLst>
+          </p:cNvPr>
+          <p:cNvSpPr>
+            <a:spLocks xmlns:a="http://schemas.openxmlformats.org/drawingml/2006/main" noGrp="1"/>
+          </p:cNvSpPr>
+          <p:nvPr/>
+        </p:nvSpPr>
+        <p:spPr>
+          <a:xfrm xmlns:a="http://schemas.openxmlformats.org/drawingml/2006/main">
+            <a:off x="971550" y="2124075"/>
+            <a:ext cx="38100" cy="3524250"/>
+          </a:xfrm>
+          <a:prstGeom xmlns:a="http://schemas.openxmlformats.org/drawingml/2006/main" prst="rect">
             <a:avLst/>
           </a:prstGeom>
           <a:solidFill xmlns:a="http://schemas.openxmlformats.org/drawingml/2006/main">
-            <a:srgbClr val="18324A"/>
+            <a:srgbClr val="2C6E73"/>
           </a:solidFill>
           <a:ln xmlns:a="http://schemas.openxmlformats.org/drawingml/2006/main" w="0">
-            <a:noFill/>
+            <a:solidFill>
+              <a:srgbClr val="2C6E73"/>
+            </a:solidFill>
           </a:ln>
         </p:spPr>
       </p:sp>
@@ -8297,19 +8299,19 @@
           <p:cNvPr id="12" name="">
             <a:extLst xmlns:a="http://schemas.openxmlformats.org/drawingml/2006/main">
               <a:ext uri="{FF2B5EF4-FFF2-40B4-BE49-F238E27FC236}">
-                <a16:creationId xmlns:a16="http://schemas.microsoft.com/office/drawing/2014/main" id="{5E224BD9-A9B2-4488-847F-EC9753F63900}"/>
-              </a:ext>
-            </a:extLst>
-          </p:cNvPr>
-          <p:cNvSpPr>
-            <a:spLocks xmlns:a="http://schemas.openxmlformats.org/drawingml/2006/main" noGrp="1"/>
-          </p:cNvSpPr>
-          <p:nvPr/>
-        </p:nvSpPr>
-        <p:spPr>
-          <a:xfrm xmlns:a="http://schemas.openxmlformats.org/drawingml/2006/main">
-            <a:off x="1000125" y="2276475"/>
-            <a:ext cx="476250" cy="419100"/>
+                <a16:creationId xmlns:a16="http://schemas.microsoft.com/office/drawing/2014/main" id="{7E1247CA-3A98-4F35-8886-BDB46469B796}"/>
+              </a:ext>
+            </a:extLst>
+          </p:cNvPr>
+          <p:cNvSpPr>
+            <a:spLocks xmlns:a="http://schemas.openxmlformats.org/drawingml/2006/main" noGrp="1"/>
+          </p:cNvSpPr>
+          <p:nvPr/>
+        </p:nvSpPr>
+        <p:spPr>
+          <a:xfrm xmlns:a="http://schemas.openxmlformats.org/drawingml/2006/main">
+            <a:off x="1162050" y="2200275"/>
+            <a:ext cx="400050" cy="400050"/>
           </a:xfrm>
           <a:prstGeom xmlns:a="http://schemas.openxmlformats.org/drawingml/2006/main" prst="rect">
             <a:avLst/>
@@ -8326,9 +8328,9 @@
           <a:lstStyle xmlns:a="http://schemas.openxmlformats.org/drawingml/2006/main"/>
           <a:p xmlns:a="http://schemas.openxmlformats.org/drawingml/2006/main">
             <a:pPr algn="ctr">
-              <a:defRPr sz="1350" b="1">
-                <a:solidFill>
-                  <a:srgbClr val="FFFFFF"/>
+              <a:defRPr sz="1125" b="1">
+                <a:solidFill>
+                  <a:srgbClr val="2C6E73"/>
                 </a:solidFill>
                 <a:latin typeface="Arial"/>
                 <a:ea typeface="Arial"/>
@@ -8336,9 +8338,9 @@
               </a:defRPr>
             </a:pPr>
             <a:r>
-              <a:rPr sz="1350" b="1">
-                <a:solidFill>
-                  <a:srgbClr val="FFFFFF"/>
+              <a:rPr sz="1125" b="1">
+                <a:solidFill>
+                  <a:srgbClr val="2C6E73"/>
                 </a:solidFill>
                 <a:latin typeface="Arial"/>
                 <a:ea typeface="Arial"/>
@@ -8354,19 +8356,19 @@
           <p:cNvPr id="13" name="">
             <a:extLst xmlns:a="http://schemas.openxmlformats.org/drawingml/2006/main">
               <a:ext uri="{FF2B5EF4-FFF2-40B4-BE49-F238E27FC236}">
-                <a16:creationId xmlns:a16="http://schemas.microsoft.com/office/drawing/2014/main" id="{30644BEC-0207-4D6A-AAA6-BF49BDB39429}"/>
-              </a:ext>
-            </a:extLst>
-          </p:cNvPr>
-          <p:cNvSpPr>
-            <a:spLocks xmlns:a="http://schemas.openxmlformats.org/drawingml/2006/main" noGrp="1"/>
-          </p:cNvSpPr>
-          <p:nvPr/>
-        </p:nvSpPr>
-        <p:spPr>
-          <a:xfrm xmlns:a="http://schemas.openxmlformats.org/drawingml/2006/main">
-            <a:off x="1714500" y="2181225"/>
-            <a:ext cx="9429750" cy="609600"/>
+                <a16:creationId xmlns:a16="http://schemas.microsoft.com/office/drawing/2014/main" id="{C1B202A7-AC37-4EEF-A8B3-79A5D1A89244}"/>
+              </a:ext>
+            </a:extLst>
+          </p:cNvPr>
+          <p:cNvSpPr>
+            <a:spLocks xmlns:a="http://schemas.openxmlformats.org/drawingml/2006/main" noGrp="1"/>
+          </p:cNvSpPr>
+          <p:nvPr/>
+        </p:nvSpPr>
+        <p:spPr>
+          <a:xfrm xmlns:a="http://schemas.openxmlformats.org/drawingml/2006/main">
+            <a:off x="1714500" y="2114550"/>
+            <a:ext cx="9525000" cy="809625"/>
           </a:xfrm>
           <a:prstGeom xmlns:a="http://schemas.openxmlformats.org/drawingml/2006/main" prst="rect">
             <a:avLst/>
@@ -8383,7 +8385,7 @@
           <a:lstStyle xmlns:a="http://schemas.openxmlformats.org/drawingml/2006/main"/>
           <a:p xmlns:a="http://schemas.openxmlformats.org/drawingml/2006/main">
             <a:pPr algn="l">
-              <a:defRPr sz="1500" b="0">
+              <a:defRPr sz="1725" b="0">
                 <a:solidFill>
                   <a:srgbClr val="17253A"/>
                 </a:solidFill>
@@ -8393,7 +8395,7 @@
               </a:defRPr>
             </a:pPr>
             <a:r>
-              <a:rPr sz="1500" b="0">
+              <a:rPr sz="1725" b="0">
                 <a:solidFill>
                   <a:srgbClr val="17253A"/>
                 </a:solidFill>
@@ -8401,7 +8403,7 @@
                 <a:ea typeface="Arial"/>
                 <a:cs typeface="Arial"/>
               </a:rPr>
-              <a:t>Identify the structure: Retrieve the relevant fact or method before answering.</a:t>
+              <a:t>Compare digits from the greatest place</a:t>
             </a:r>
           </a:p>
         </p:txBody>
@@ -8411,28 +8413,30 @@
           <p:cNvPr id="14" name="">
             <a:extLst xmlns:a="http://schemas.openxmlformats.org/drawingml/2006/main">
               <a:ext uri="{FF2B5EF4-FFF2-40B4-BE49-F238E27FC236}">
-                <a16:creationId xmlns:a16="http://schemas.microsoft.com/office/drawing/2014/main" id="{AAE36A01-2443-4BB1-A30D-99415EEBFD5B}"/>
-              </a:ext>
-            </a:extLst>
-          </p:cNvPr>
-          <p:cNvSpPr>
-            <a:spLocks xmlns:a="http://schemas.openxmlformats.org/drawingml/2006/main" noGrp="1"/>
-          </p:cNvSpPr>
-          <p:nvPr/>
-        </p:nvSpPr>
-        <p:spPr>
-          <a:xfrm xmlns:a="http://schemas.openxmlformats.org/drawingml/2006/main">
-            <a:off x="1000125" y="2990850"/>
-            <a:ext cx="476250" cy="476250"/>
-          </a:xfrm>
-          <a:prstGeom xmlns:a="http://schemas.openxmlformats.org/drawingml/2006/main" prst="ellipse">
+                <a16:creationId xmlns:a16="http://schemas.microsoft.com/office/drawing/2014/main" id="{23B3C125-CBAE-4964-A62A-7220A66E2672}"/>
+              </a:ext>
+            </a:extLst>
+          </p:cNvPr>
+          <p:cNvSpPr>
+            <a:spLocks xmlns:a="http://schemas.openxmlformats.org/drawingml/2006/main" noGrp="1"/>
+          </p:cNvSpPr>
+          <p:nvPr/>
+        </p:nvSpPr>
+        <p:spPr>
+          <a:xfrm xmlns:a="http://schemas.openxmlformats.org/drawingml/2006/main">
+            <a:off x="1714500" y="2943225"/>
+            <a:ext cx="9334500" cy="9525"/>
+          </a:xfrm>
+          <a:prstGeom xmlns:a="http://schemas.openxmlformats.org/drawingml/2006/main" prst="rect">
             <a:avLst/>
           </a:prstGeom>
           <a:solidFill xmlns:a="http://schemas.openxmlformats.org/drawingml/2006/main">
-            <a:srgbClr val="2C6E73"/>
+            <a:srgbClr val="D9E0E6"/>
           </a:solidFill>
           <a:ln xmlns:a="http://schemas.openxmlformats.org/drawingml/2006/main" w="0">
-            <a:noFill/>
+            <a:solidFill>
+              <a:srgbClr val="D9E0E6"/>
+            </a:solidFill>
           </a:ln>
         </p:spPr>
       </p:sp>
@@ -8441,19 +8445,19 @@
           <p:cNvPr id="15" name="">
             <a:extLst xmlns:a="http://schemas.openxmlformats.org/drawingml/2006/main">
               <a:ext uri="{FF2B5EF4-FFF2-40B4-BE49-F238E27FC236}">
-                <a16:creationId xmlns:a16="http://schemas.microsoft.com/office/drawing/2014/main" id="{F82508B9-31FF-4756-A8F4-FF90FC43C539}"/>
-              </a:ext>
-            </a:extLst>
-          </p:cNvPr>
-          <p:cNvSpPr>
-            <a:spLocks xmlns:a="http://schemas.openxmlformats.org/drawingml/2006/main" noGrp="1"/>
-          </p:cNvSpPr>
-          <p:nvPr/>
-        </p:nvSpPr>
-        <p:spPr>
-          <a:xfrm xmlns:a="http://schemas.openxmlformats.org/drawingml/2006/main">
-            <a:off x="1000125" y="3019425"/>
-            <a:ext cx="476250" cy="419100"/>
+                <a16:creationId xmlns:a16="http://schemas.microsoft.com/office/drawing/2014/main" id="{EC962C61-7254-470A-817A-1425B919ED20}"/>
+              </a:ext>
+            </a:extLst>
+          </p:cNvPr>
+          <p:cNvSpPr>
+            <a:spLocks xmlns:a="http://schemas.openxmlformats.org/drawingml/2006/main" noGrp="1"/>
+          </p:cNvSpPr>
+          <p:nvPr/>
+        </p:nvSpPr>
+        <p:spPr>
+          <a:xfrm xmlns:a="http://schemas.openxmlformats.org/drawingml/2006/main">
+            <a:off x="1162050" y="3076575"/>
+            <a:ext cx="400050" cy="400050"/>
           </a:xfrm>
           <a:prstGeom xmlns:a="http://schemas.openxmlformats.org/drawingml/2006/main" prst="rect">
             <a:avLst/>
@@ -8470,9 +8474,9 @@
           <a:lstStyle xmlns:a="http://schemas.openxmlformats.org/drawingml/2006/main"/>
           <a:p xmlns:a="http://schemas.openxmlformats.org/drawingml/2006/main">
             <a:pPr algn="ctr">
-              <a:defRPr sz="1350" b="1">
-                <a:solidFill>
-                  <a:srgbClr val="FFFFFF"/>
+              <a:defRPr sz="1125" b="1">
+                <a:solidFill>
+                  <a:srgbClr val="2C6E73"/>
                 </a:solidFill>
                 <a:latin typeface="Arial"/>
                 <a:ea typeface="Arial"/>
@@ -8480,9 +8484,9 @@
               </a:defRPr>
             </a:pPr>
             <a:r>
-              <a:rPr sz="1350" b="1">
-                <a:solidFill>
-                  <a:srgbClr val="FFFFFF"/>
+              <a:rPr sz="1125" b="1">
+                <a:solidFill>
+                  <a:srgbClr val="2C6E73"/>
                 </a:solidFill>
                 <a:latin typeface="Arial"/>
                 <a:ea typeface="Arial"/>
@@ -8498,19 +8502,19 @@
           <p:cNvPr id="16" name="">
             <a:extLst xmlns:a="http://schemas.openxmlformats.org/drawingml/2006/main">
               <a:ext uri="{FF2B5EF4-FFF2-40B4-BE49-F238E27FC236}">
-                <a16:creationId xmlns:a16="http://schemas.microsoft.com/office/drawing/2014/main" id="{2EE8F2FE-0501-4F01-BFA6-AA6422A7583B}"/>
-              </a:ext>
-            </a:extLst>
-          </p:cNvPr>
-          <p:cNvSpPr>
-            <a:spLocks xmlns:a="http://schemas.openxmlformats.org/drawingml/2006/main" noGrp="1"/>
-          </p:cNvSpPr>
-          <p:nvPr/>
-        </p:nvSpPr>
-        <p:spPr>
-          <a:xfrm xmlns:a="http://schemas.openxmlformats.org/drawingml/2006/main">
-            <a:off x="1714500" y="2924175"/>
-            <a:ext cx="9429750" cy="609600"/>
+                <a16:creationId xmlns:a16="http://schemas.microsoft.com/office/drawing/2014/main" id="{B82146AA-5173-431D-A13E-F6612CA0E0C5}"/>
+              </a:ext>
+            </a:extLst>
+          </p:cNvPr>
+          <p:cNvSpPr>
+            <a:spLocks xmlns:a="http://schemas.openxmlformats.org/drawingml/2006/main" noGrp="1"/>
+          </p:cNvSpPr>
+          <p:nvPr/>
+        </p:nvSpPr>
+        <p:spPr>
+          <a:xfrm xmlns:a="http://schemas.openxmlformats.org/drawingml/2006/main">
+            <a:off x="1714500" y="2990850"/>
+            <a:ext cx="9525000" cy="809625"/>
           </a:xfrm>
           <a:prstGeom xmlns:a="http://schemas.openxmlformats.org/drawingml/2006/main" prst="rect">
             <a:avLst/>
@@ -8527,7 +8531,7 @@
           <a:lstStyle xmlns:a="http://schemas.openxmlformats.org/drawingml/2006/main"/>
           <a:p xmlns:a="http://schemas.openxmlformats.org/drawingml/2006/main">
             <a:pPr algn="l">
-              <a:defRPr sz="1500" b="0">
+              <a:defRPr sz="1725" b="0">
                 <a:solidFill>
                   <a:srgbClr val="17253A"/>
                 </a:solidFill>
@@ -8537,7 +8541,7 @@
               </a:defRPr>
             </a:pPr>
             <a:r>
-              <a:rPr sz="1500" b="0">
+              <a:rPr sz="1725" b="0">
                 <a:solidFill>
                   <a:srgbClr val="17253A"/>
                 </a:solidFill>
@@ -8545,7 +8549,7 @@
                 <a:ea typeface="Arial"/>
                 <a:cs typeface="Arial"/>
               </a:rPr>
-              <a:t>Set up the method: Show a clear calculation or representation and explain the decision.</a:t>
+              <a:t>6,890,201 &lt; 6,908,210 &lt; 6,980,120</a:t>
             </a:r>
           </a:p>
         </p:txBody>
@@ -8555,28 +8559,30 @@
           <p:cNvPr id="17" name="">
             <a:extLst xmlns:a="http://schemas.openxmlformats.org/drawingml/2006/main">
               <a:ext uri="{FF2B5EF4-FFF2-40B4-BE49-F238E27FC236}">
-                <a16:creationId xmlns:a16="http://schemas.microsoft.com/office/drawing/2014/main" id="{37DAEE65-1E4F-4E88-9E8A-F778E46024EA}"/>
-              </a:ext>
-            </a:extLst>
-          </p:cNvPr>
-          <p:cNvSpPr>
-            <a:spLocks xmlns:a="http://schemas.openxmlformats.org/drawingml/2006/main" noGrp="1"/>
-          </p:cNvSpPr>
-          <p:nvPr/>
-        </p:nvSpPr>
-        <p:spPr>
-          <a:xfrm xmlns:a="http://schemas.openxmlformats.org/drawingml/2006/main">
-            <a:off x="1000125" y="3733800"/>
-            <a:ext cx="476250" cy="476250"/>
-          </a:xfrm>
-          <a:prstGeom xmlns:a="http://schemas.openxmlformats.org/drawingml/2006/main" prst="ellipse">
+                <a16:creationId xmlns:a16="http://schemas.microsoft.com/office/drawing/2014/main" id="{FF6256CF-B391-4DE2-9A13-01BA92BC6F4F}"/>
+              </a:ext>
+            </a:extLst>
+          </p:cNvPr>
+          <p:cNvSpPr>
+            <a:spLocks xmlns:a="http://schemas.openxmlformats.org/drawingml/2006/main" noGrp="1"/>
+          </p:cNvSpPr>
+          <p:nvPr/>
+        </p:nvSpPr>
+        <p:spPr>
+          <a:xfrm xmlns:a="http://schemas.openxmlformats.org/drawingml/2006/main">
+            <a:off x="1714500" y="3819525"/>
+            <a:ext cx="9334500" cy="9525"/>
+          </a:xfrm>
+          <a:prstGeom xmlns:a="http://schemas.openxmlformats.org/drawingml/2006/main" prst="rect">
             <a:avLst/>
           </a:prstGeom>
           <a:solidFill xmlns:a="http://schemas.openxmlformats.org/drawingml/2006/main">
-            <a:srgbClr val="2C6E73"/>
+            <a:srgbClr val="D9E0E6"/>
           </a:solidFill>
           <a:ln xmlns:a="http://schemas.openxmlformats.org/drawingml/2006/main" w="0">
-            <a:noFill/>
+            <a:solidFill>
+              <a:srgbClr val="D9E0E6"/>
+            </a:solidFill>
           </a:ln>
         </p:spPr>
       </p:sp>
@@ -8585,19 +8591,19 @@
           <p:cNvPr id="18" name="">
             <a:extLst xmlns:a="http://schemas.openxmlformats.org/drawingml/2006/main">
               <a:ext uri="{FF2B5EF4-FFF2-40B4-BE49-F238E27FC236}">
-                <a16:creationId xmlns:a16="http://schemas.microsoft.com/office/drawing/2014/main" id="{8635E709-038F-4511-97DF-C9D8A5260886}"/>
-              </a:ext>
-            </a:extLst>
-          </p:cNvPr>
-          <p:cNvSpPr>
-            <a:spLocks xmlns:a="http://schemas.openxmlformats.org/drawingml/2006/main" noGrp="1"/>
-          </p:cNvSpPr>
-          <p:nvPr/>
-        </p:nvSpPr>
-        <p:spPr>
-          <a:xfrm xmlns:a="http://schemas.openxmlformats.org/drawingml/2006/main">
-            <a:off x="1000125" y="3762375"/>
-            <a:ext cx="476250" cy="419100"/>
+                <a16:creationId xmlns:a16="http://schemas.microsoft.com/office/drawing/2014/main" id="{5F75CBA8-3040-45EB-9706-A6312A775FE3}"/>
+              </a:ext>
+            </a:extLst>
+          </p:cNvPr>
+          <p:cNvSpPr>
+            <a:spLocks xmlns:a="http://schemas.openxmlformats.org/drawingml/2006/main" noGrp="1"/>
+          </p:cNvSpPr>
+          <p:nvPr/>
+        </p:nvSpPr>
+        <p:spPr>
+          <a:xfrm xmlns:a="http://schemas.openxmlformats.org/drawingml/2006/main">
+            <a:off x="1162050" y="3952875"/>
+            <a:ext cx="400050" cy="400050"/>
           </a:xfrm>
           <a:prstGeom xmlns:a="http://schemas.openxmlformats.org/drawingml/2006/main" prst="rect">
             <a:avLst/>
@@ -8614,9 +8620,9 @@
           <a:lstStyle xmlns:a="http://schemas.openxmlformats.org/drawingml/2006/main"/>
           <a:p xmlns:a="http://schemas.openxmlformats.org/drawingml/2006/main">
             <a:pPr algn="ctr">
-              <a:defRPr sz="1350" b="1">
-                <a:solidFill>
-                  <a:srgbClr val="FFFFFF"/>
+              <a:defRPr sz="1125" b="1">
+                <a:solidFill>
+                  <a:srgbClr val="2C6E73"/>
                 </a:solidFill>
                 <a:latin typeface="Arial"/>
                 <a:ea typeface="Arial"/>
@@ -8624,9 +8630,9 @@
               </a:defRPr>
             </a:pPr>
             <a:r>
-              <a:rPr sz="1350" b="1">
-                <a:solidFill>
-                  <a:srgbClr val="FFFFFF"/>
+              <a:rPr sz="1125" b="1">
+                <a:solidFill>
+                  <a:srgbClr val="2C6E73"/>
                 </a:solidFill>
                 <a:latin typeface="Arial"/>
                 <a:ea typeface="Arial"/>
@@ -8642,19 +8648,19 @@
           <p:cNvPr id="19" name="">
             <a:extLst xmlns:a="http://schemas.openxmlformats.org/drawingml/2006/main">
               <a:ext uri="{FF2B5EF4-FFF2-40B4-BE49-F238E27FC236}">
-                <a16:creationId xmlns:a16="http://schemas.microsoft.com/office/drawing/2014/main" id="{70211ECD-4C89-4AA0-A661-8EE299148A0D}"/>
-              </a:ext>
-            </a:extLst>
-          </p:cNvPr>
-          <p:cNvSpPr>
-            <a:spLocks xmlns:a="http://schemas.openxmlformats.org/drawingml/2006/main" noGrp="1"/>
-          </p:cNvSpPr>
-          <p:nvPr/>
-        </p:nvSpPr>
-        <p:spPr>
-          <a:xfrm xmlns:a="http://schemas.openxmlformats.org/drawingml/2006/main">
-            <a:off x="1714500" y="3667125"/>
-            <a:ext cx="9429750" cy="609600"/>
+                <a16:creationId xmlns:a16="http://schemas.microsoft.com/office/drawing/2014/main" id="{4136C3DA-2737-4EE8-A6AC-8B3C75B6BB70}"/>
+              </a:ext>
+            </a:extLst>
+          </p:cNvPr>
+          <p:cNvSpPr>
+            <a:spLocks xmlns:a="http://schemas.openxmlformats.org/drawingml/2006/main" noGrp="1"/>
+          </p:cNvSpPr>
+          <p:nvPr/>
+        </p:nvSpPr>
+        <p:spPr>
+          <a:xfrm xmlns:a="http://schemas.openxmlformats.org/drawingml/2006/main">
+            <a:off x="1714500" y="3867150"/>
+            <a:ext cx="9525000" cy="809625"/>
           </a:xfrm>
           <a:prstGeom xmlns:a="http://schemas.openxmlformats.org/drawingml/2006/main" prst="rect">
             <a:avLst/>
@@ -8671,7 +8677,7 @@
           <a:lstStyle xmlns:a="http://schemas.openxmlformats.org/drawingml/2006/main"/>
           <a:p xmlns:a="http://schemas.openxmlformats.org/drawingml/2006/main">
             <a:pPr algn="l">
-              <a:defRPr sz="1500" b="0">
+              <a:defRPr sz="1725" b="0">
                 <a:solidFill>
                   <a:srgbClr val="17253A"/>
                 </a:solidFill>
@@ -8681,7 +8687,7 @@
               </a:defRPr>
             </a:pPr>
             <a:r>
-              <a:rPr sz="1500" b="0">
+              <a:rPr sz="1725" b="0">
                 <a:solidFill>
                   <a:srgbClr val="17253A"/>
                 </a:solidFill>
@@ -8689,7 +8695,7 @@
                 <a:ea typeface="Arial"/>
                 <a:cs typeface="Arial"/>
               </a:rPr>
-              <a:t>Complete the calculation: Order: 6,890,201; 6,908,210; 6,980,120. Rounded: 6,900,000; 6,900,000; 7,000,000.</a:t>
+              <a:t>Round each to the nearest 100,000</a:t>
             </a:r>
           </a:p>
         </p:txBody>
@@ -8699,28 +8705,30 @@
           <p:cNvPr id="20" name="">
             <a:extLst xmlns:a="http://schemas.openxmlformats.org/drawingml/2006/main">
               <a:ext uri="{FF2B5EF4-FFF2-40B4-BE49-F238E27FC236}">
-                <a16:creationId xmlns:a16="http://schemas.microsoft.com/office/drawing/2014/main" id="{9952CE4B-EDC5-41F9-8597-D32C0880A9F5}"/>
-              </a:ext>
-            </a:extLst>
-          </p:cNvPr>
-          <p:cNvSpPr>
-            <a:spLocks xmlns:a="http://schemas.openxmlformats.org/drawingml/2006/main" noGrp="1"/>
-          </p:cNvSpPr>
-          <p:nvPr/>
-        </p:nvSpPr>
-        <p:spPr>
-          <a:xfrm xmlns:a="http://schemas.openxmlformats.org/drawingml/2006/main">
-            <a:off x="1000125" y="4476750"/>
-            <a:ext cx="476250" cy="476250"/>
-          </a:xfrm>
-          <a:prstGeom xmlns:a="http://schemas.openxmlformats.org/drawingml/2006/main" prst="ellipse">
+                <a16:creationId xmlns:a16="http://schemas.microsoft.com/office/drawing/2014/main" id="{53A0E74C-50E6-4C26-B61D-BB2A8A5DBAE6}"/>
+              </a:ext>
+            </a:extLst>
+          </p:cNvPr>
+          <p:cNvSpPr>
+            <a:spLocks xmlns:a="http://schemas.openxmlformats.org/drawingml/2006/main" noGrp="1"/>
+          </p:cNvSpPr>
+          <p:nvPr/>
+        </p:nvSpPr>
+        <p:spPr>
+          <a:xfrm xmlns:a="http://schemas.openxmlformats.org/drawingml/2006/main">
+            <a:off x="1714500" y="4695825"/>
+            <a:ext cx="9334500" cy="9525"/>
+          </a:xfrm>
+          <a:prstGeom xmlns:a="http://schemas.openxmlformats.org/drawingml/2006/main" prst="rect">
             <a:avLst/>
           </a:prstGeom>
           <a:solidFill xmlns:a="http://schemas.openxmlformats.org/drawingml/2006/main">
-            <a:srgbClr val="2C6E73"/>
+            <a:srgbClr val="D9E0E6"/>
           </a:solidFill>
           <a:ln xmlns:a="http://schemas.openxmlformats.org/drawingml/2006/main" w="0">
-            <a:noFill/>
+            <a:solidFill>
+              <a:srgbClr val="D9E0E6"/>
+            </a:solidFill>
           </a:ln>
         </p:spPr>
       </p:sp>
@@ -8729,19 +8737,19 @@
           <p:cNvPr id="21" name="">
             <a:extLst xmlns:a="http://schemas.openxmlformats.org/drawingml/2006/main">
               <a:ext uri="{FF2B5EF4-FFF2-40B4-BE49-F238E27FC236}">
-                <a16:creationId xmlns:a16="http://schemas.microsoft.com/office/drawing/2014/main" id="{E3B907C0-97B2-4134-9C0E-48214EE9A746}"/>
-              </a:ext>
-            </a:extLst>
-          </p:cNvPr>
-          <p:cNvSpPr>
-            <a:spLocks xmlns:a="http://schemas.openxmlformats.org/drawingml/2006/main" noGrp="1"/>
-          </p:cNvSpPr>
-          <p:nvPr/>
-        </p:nvSpPr>
-        <p:spPr>
-          <a:xfrm xmlns:a="http://schemas.openxmlformats.org/drawingml/2006/main">
-            <a:off x="1000125" y="4505325"/>
-            <a:ext cx="476250" cy="419100"/>
+                <a16:creationId xmlns:a16="http://schemas.microsoft.com/office/drawing/2014/main" id="{49BC6FB4-A3F8-4BB4-9131-07F4BC11CF24}"/>
+              </a:ext>
+            </a:extLst>
+          </p:cNvPr>
+          <p:cNvSpPr>
+            <a:spLocks xmlns:a="http://schemas.openxmlformats.org/drawingml/2006/main" noGrp="1"/>
+          </p:cNvSpPr>
+          <p:nvPr/>
+        </p:nvSpPr>
+        <p:spPr>
+          <a:xfrm xmlns:a="http://schemas.openxmlformats.org/drawingml/2006/main">
+            <a:off x="1162050" y="4829175"/>
+            <a:ext cx="400050" cy="400050"/>
           </a:xfrm>
           <a:prstGeom xmlns:a="http://schemas.openxmlformats.org/drawingml/2006/main" prst="rect">
             <a:avLst/>
@@ -8758,9 +8766,9 @@
           <a:lstStyle xmlns:a="http://schemas.openxmlformats.org/drawingml/2006/main"/>
           <a:p xmlns:a="http://schemas.openxmlformats.org/drawingml/2006/main">
             <a:pPr algn="ctr">
-              <a:defRPr sz="1350" b="1">
-                <a:solidFill>
-                  <a:srgbClr val="FFFFFF"/>
+              <a:defRPr sz="1125" b="1">
+                <a:solidFill>
+                  <a:srgbClr val="2F785D"/>
                 </a:solidFill>
                 <a:latin typeface="Arial"/>
                 <a:ea typeface="Arial"/>
@@ -8768,9 +8776,9 @@
               </a:defRPr>
             </a:pPr>
             <a:r>
-              <a:rPr sz="1350" b="1">
-                <a:solidFill>
-                  <a:srgbClr val="FFFFFF"/>
+              <a:rPr sz="1125" b="1">
+                <a:solidFill>
+                  <a:srgbClr val="2F785D"/>
                 </a:solidFill>
                 <a:latin typeface="Arial"/>
                 <a:ea typeface="Arial"/>
@@ -8786,19 +8794,19 @@
           <p:cNvPr id="22" name="">
             <a:extLst xmlns:a="http://schemas.openxmlformats.org/drawingml/2006/main">
               <a:ext uri="{FF2B5EF4-FFF2-40B4-BE49-F238E27FC236}">
-                <a16:creationId xmlns:a16="http://schemas.microsoft.com/office/drawing/2014/main" id="{6D5224E8-419C-4119-9F29-BB8F015B0526}"/>
-              </a:ext>
-            </a:extLst>
-          </p:cNvPr>
-          <p:cNvSpPr>
-            <a:spLocks xmlns:a="http://schemas.openxmlformats.org/drawingml/2006/main" noGrp="1"/>
-          </p:cNvSpPr>
-          <p:nvPr/>
-        </p:nvSpPr>
-        <p:spPr>
-          <a:xfrm xmlns:a="http://schemas.openxmlformats.org/drawingml/2006/main">
-            <a:off x="1714500" y="4410075"/>
-            <a:ext cx="9429750" cy="609600"/>
+                <a16:creationId xmlns:a16="http://schemas.microsoft.com/office/drawing/2014/main" id="{782E2C19-FE5A-480D-9573-A3D9B14BFAE8}"/>
+              </a:ext>
+            </a:extLst>
+          </p:cNvPr>
+          <p:cNvSpPr>
+            <a:spLocks xmlns:a="http://schemas.openxmlformats.org/drawingml/2006/main" noGrp="1"/>
+          </p:cNvSpPr>
+          <p:nvPr/>
+        </p:nvSpPr>
+        <p:spPr>
+          <a:xfrm xmlns:a="http://schemas.openxmlformats.org/drawingml/2006/main">
+            <a:off x="1714500" y="4743450"/>
+            <a:ext cx="9525000" cy="809625"/>
           </a:xfrm>
           <a:prstGeom xmlns:a="http://schemas.openxmlformats.org/drawingml/2006/main" prst="rect">
             <a:avLst/>
@@ -8815,7 +8823,7 @@
           <a:lstStyle xmlns:a="http://schemas.openxmlformats.org/drawingml/2006/main"/>
           <a:p xmlns:a="http://schemas.openxmlformats.org/drawingml/2006/main">
             <a:pPr algn="l">
-              <a:defRPr sz="1500" b="1">
+              <a:defRPr sz="1725" b="1">
                 <a:solidFill>
                   <a:srgbClr val="2F785D"/>
                 </a:solidFill>
@@ -8825,7 +8833,7 @@
               </a:defRPr>
             </a:pPr>
             <a:r>
-              <a:rPr sz="1500" b="1">
+              <a:rPr sz="1725" b="1">
                 <a:solidFill>
                   <a:srgbClr val="2F785D"/>
                 </a:solidFill>
@@ -8833,7 +8841,7 @@
                 <a:ea typeface="Arial"/>
                 <a:cs typeface="Arial"/>
               </a:rPr>
-              <a:t>Check the result: Check the result, identify any misconception and record the next step.</a:t>
+              <a:t>6,900,000     6,900,000     7,000,000</a:t>
             </a:r>
           </a:p>
         </p:txBody>
@@ -8841,7 +8849,7 @@
     </p:spTree>
     <p:extLst>
       <p:ext uri="{BB962C8B-B14F-4D97-AF65-F5344CB8AC3E}">
-        <p14:creationId xmlns:p14="http://schemas.microsoft.com/office/powerpoint/2010/main" val="362591708"/>
+        <p14:creationId xmlns:p14="http://schemas.microsoft.com/office/powerpoint/2010/main" val="1468847478"/>
       </p:ext>
     </p:extLst>
   </p:cSld>
@@ -9134,7 +9142,7 @@
           <p:cNvPr id="15" name="">
             <a:extLst xmlns:a="http://schemas.openxmlformats.org/drawingml/2006/main">
               <a:ext uri="{FF2B5EF4-FFF2-40B4-BE49-F238E27FC236}">
-                <a16:creationId xmlns:a16="http://schemas.microsoft.com/office/drawing/2014/main" id="{3AAE3A15-F238-4385-B23C-2007DB4F17C2}"/>
+                <a16:creationId xmlns:a16="http://schemas.microsoft.com/office/drawing/2014/main" id="{5A4BDB3B-25D2-43CB-BBF0-B98A925D5B36}"/>
               </a:ext>
             </a:extLst>
           </p:cNvPr>
@@ -9166,7 +9174,7 @@
           <p:cNvPr id="2" name="">
             <a:extLst xmlns:a="http://schemas.openxmlformats.org/drawingml/2006/main">
               <a:ext uri="{FF2B5EF4-FFF2-40B4-BE49-F238E27FC236}">
-                <a16:creationId xmlns:a16="http://schemas.microsoft.com/office/drawing/2014/main" id="{87C3C81B-4726-4E8D-84E2-779B02BC974B}"/>
+                <a16:creationId xmlns:a16="http://schemas.microsoft.com/office/drawing/2014/main" id="{1763D642-8B2C-45FC-B27E-918B28F53BD7}"/>
               </a:ext>
             </a:extLst>
           </p:cNvPr>
@@ -9223,7 +9231,7 @@
           <p:cNvPr id="3" name="">
             <a:extLst xmlns:a="http://schemas.openxmlformats.org/drawingml/2006/main">
               <a:ext uri="{FF2B5EF4-FFF2-40B4-BE49-F238E27FC236}">
-                <a16:creationId xmlns:a16="http://schemas.microsoft.com/office/drawing/2014/main" id="{0EDD2184-E464-49FA-8378-2080D74C1FCC}"/>
+                <a16:creationId xmlns:a16="http://schemas.microsoft.com/office/drawing/2014/main" id="{DF345F2C-F4BD-48FB-B611-D7DD19935D41}"/>
               </a:ext>
             </a:extLst>
           </p:cNvPr>
@@ -9255,7 +9263,7 @@
           <p:cNvPr id="4" name="">
             <a:extLst xmlns:a="http://schemas.openxmlformats.org/drawingml/2006/main">
               <a:ext uri="{FF2B5EF4-FFF2-40B4-BE49-F238E27FC236}">
-                <a16:creationId xmlns:a16="http://schemas.microsoft.com/office/drawing/2014/main" id="{AABA70DB-E715-4239-923B-5EC05B70FD9F}"/>
+                <a16:creationId xmlns:a16="http://schemas.microsoft.com/office/drawing/2014/main" id="{7E58CD55-F4BD-4AFA-8108-83D0518C4D06}"/>
               </a:ext>
             </a:extLst>
           </p:cNvPr>
@@ -9312,7 +9320,7 @@
           <p:cNvPr id="5" name="">
             <a:extLst xmlns:a="http://schemas.openxmlformats.org/drawingml/2006/main">
               <a:ext uri="{FF2B5EF4-FFF2-40B4-BE49-F238E27FC236}">
-                <a16:creationId xmlns:a16="http://schemas.microsoft.com/office/drawing/2014/main" id="{5B8A64A8-4FA7-4737-A7D2-7F3849918556}"/>
+                <a16:creationId xmlns:a16="http://schemas.microsoft.com/office/drawing/2014/main" id="{9D61DBF4-6C11-4650-9025-1EA6662494B5}"/>
               </a:ext>
             </a:extLst>
           </p:cNvPr>
@@ -9369,7 +9377,7 @@
           <p:cNvPr id="6" name="">
             <a:extLst xmlns:a="http://schemas.openxmlformats.org/drawingml/2006/main">
               <a:ext uri="{FF2B5EF4-FFF2-40B4-BE49-F238E27FC236}">
-                <a16:creationId xmlns:a16="http://schemas.microsoft.com/office/drawing/2014/main" id="{2833893B-8FE1-426C-8DF7-09E6BC1595B9}"/>
+                <a16:creationId xmlns:a16="http://schemas.microsoft.com/office/drawing/2014/main" id="{A008FCB2-C82A-40BA-AF04-8C575341208D}"/>
               </a:ext>
             </a:extLst>
           </p:cNvPr>
@@ -9426,7 +9434,7 @@
           <p:cNvPr id="7" name="">
             <a:extLst xmlns:a="http://schemas.openxmlformats.org/drawingml/2006/main">
               <a:ext uri="{FF2B5EF4-FFF2-40B4-BE49-F238E27FC236}">
-                <a16:creationId xmlns:a16="http://schemas.microsoft.com/office/drawing/2014/main" id="{2B6A1FE6-3C27-4056-A394-3E9ACFCCEC24}"/>
+                <a16:creationId xmlns:a16="http://schemas.microsoft.com/office/drawing/2014/main" id="{54728822-8679-4CA1-B106-CA2EDD16EDAB}"/>
               </a:ext>
             </a:extLst>
           </p:cNvPr>
@@ -9458,7 +9466,7 @@
           <p:cNvPr id="8" name="">
             <a:extLst xmlns:a="http://schemas.openxmlformats.org/drawingml/2006/main">
               <a:ext uri="{FF2B5EF4-FFF2-40B4-BE49-F238E27FC236}">
-                <a16:creationId xmlns:a16="http://schemas.microsoft.com/office/drawing/2014/main" id="{7F9C4727-EDC8-457E-AE34-6D1C61307CFE}"/>
+                <a16:creationId xmlns:a16="http://schemas.microsoft.com/office/drawing/2014/main" id="{F961E28D-D004-4399-84E3-87DF739419FA}"/>
               </a:ext>
             </a:extLst>
           </p:cNvPr>
@@ -9515,7 +9523,7 @@
           <p:cNvPr id="9" name="">
             <a:extLst xmlns:a="http://schemas.openxmlformats.org/drawingml/2006/main">
               <a:ext uri="{FF2B5EF4-FFF2-40B4-BE49-F238E27FC236}">
-                <a16:creationId xmlns:a16="http://schemas.microsoft.com/office/drawing/2014/main" id="{1F9B5B14-3D36-4B16-8D87-F876C837474C}"/>
+                <a16:creationId xmlns:a16="http://schemas.microsoft.com/office/drawing/2014/main" id="{A9C471AA-5FCC-495C-A752-B9364A2C63A9}"/>
               </a:ext>
             </a:extLst>
           </p:cNvPr>
@@ -9572,7 +9580,7 @@
           <p:cNvPr id="10" name="">
             <a:extLst xmlns:a="http://schemas.openxmlformats.org/drawingml/2006/main">
               <a:ext uri="{FF2B5EF4-FFF2-40B4-BE49-F238E27FC236}">
-                <a16:creationId xmlns:a16="http://schemas.microsoft.com/office/drawing/2014/main" id="{8EEF962D-A93C-481B-A520-D9F0E11CA57E}"/>
+                <a16:creationId xmlns:a16="http://schemas.microsoft.com/office/drawing/2014/main" id="{93531E10-211D-41F5-8A63-35BDAA0CF954}"/>
               </a:ext>
             </a:extLst>
           </p:cNvPr>
@@ -9629,7 +9637,7 @@
           <p:cNvPr id="11" name="">
             <a:extLst xmlns:a="http://schemas.openxmlformats.org/drawingml/2006/main">
               <a:ext uri="{FF2B5EF4-FFF2-40B4-BE49-F238E27FC236}">
-                <a16:creationId xmlns:a16="http://schemas.microsoft.com/office/drawing/2014/main" id="{155F1216-DF20-4AF2-BA9A-DA0D7ACFE35B}"/>
+                <a16:creationId xmlns:a16="http://schemas.microsoft.com/office/drawing/2014/main" id="{EA68D517-ED24-42A5-BF96-1FDEDB4C81A3}"/>
               </a:ext>
             </a:extLst>
           </p:cNvPr>
@@ -9686,7 +9694,7 @@
           <p:cNvPr id="12" name="">
             <a:extLst xmlns:a="http://schemas.openxmlformats.org/drawingml/2006/main">
               <a:ext uri="{FF2B5EF4-FFF2-40B4-BE49-F238E27FC236}">
-                <a16:creationId xmlns:a16="http://schemas.microsoft.com/office/drawing/2014/main" id="{84EF5824-C2A0-4777-B3AD-828DBEC43398}"/>
+                <a16:creationId xmlns:a16="http://schemas.microsoft.com/office/drawing/2014/main" id="{24DD3FB4-4847-47D5-8B58-16C961DFFF8B}"/>
               </a:ext>
             </a:extLst>
           </p:cNvPr>
@@ -9718,7 +9726,7 @@
           <p:cNvPr id="13" name="">
             <a:extLst xmlns:a="http://schemas.openxmlformats.org/drawingml/2006/main">
               <a:ext uri="{FF2B5EF4-FFF2-40B4-BE49-F238E27FC236}">
-                <a16:creationId xmlns:a16="http://schemas.microsoft.com/office/drawing/2014/main" id="{290AD9D9-870C-45AD-B112-B5EDBA82BF19}"/>
+                <a16:creationId xmlns:a16="http://schemas.microsoft.com/office/drawing/2014/main" id="{6C573EE6-3DFD-42AE-8B27-C747A8CE6CC4}"/>
               </a:ext>
             </a:extLst>
           </p:cNvPr>
@@ -9775,7 +9783,7 @@
           <p:cNvPr id="14" name="">
             <a:extLst xmlns:a="http://schemas.openxmlformats.org/drawingml/2006/main">
               <a:ext uri="{FF2B5EF4-FFF2-40B4-BE49-F238E27FC236}">
-                <a16:creationId xmlns:a16="http://schemas.microsoft.com/office/drawing/2014/main" id="{E3D44D99-9D49-4959-ACE8-99DF6636FF9F}"/>
+                <a16:creationId xmlns:a16="http://schemas.microsoft.com/office/drawing/2014/main" id="{2F366F7F-C634-485B-B556-3C8B8AE8BAC2}"/>
               </a:ext>
             </a:extLst>
           </p:cNvPr>
@@ -9830,7 +9838,7 @@
     </p:spTree>
     <p:extLst>
       <p:ext uri="{BB962C8B-B14F-4D97-AF65-F5344CB8AC3E}">
-        <p14:creationId xmlns:p14="http://schemas.microsoft.com/office/powerpoint/2010/main" val="681302309"/>
+        <p14:creationId xmlns:p14="http://schemas.microsoft.com/office/powerpoint/2010/main" val="600437722"/>
       </p:ext>
     </p:extLst>
   </p:cSld>
@@ -10031,7 +10039,7 @@
           <p:cNvPr id="16" name="">
             <a:extLst xmlns:a="http://schemas.openxmlformats.org/drawingml/2006/main">
               <a:ext uri="{FF2B5EF4-FFF2-40B4-BE49-F238E27FC236}">
-                <a16:creationId xmlns:a16="http://schemas.microsoft.com/office/drawing/2014/main" id="{34A773BE-05D3-4833-AC58-2148205EB60F}"/>
+                <a16:creationId xmlns:a16="http://schemas.microsoft.com/office/drawing/2014/main" id="{0B38D134-A492-4177-9CE4-11F555A1ADB4}"/>
               </a:ext>
             </a:extLst>
           </p:cNvPr>
@@ -10063,7 +10071,7 @@
           <p:cNvPr id="2" name="">
             <a:extLst xmlns:a="http://schemas.openxmlformats.org/drawingml/2006/main">
               <a:ext uri="{FF2B5EF4-FFF2-40B4-BE49-F238E27FC236}">
-                <a16:creationId xmlns:a16="http://schemas.microsoft.com/office/drawing/2014/main" id="{D4547E5E-20F9-4AAF-90B0-B0323E638992}"/>
+                <a16:creationId xmlns:a16="http://schemas.microsoft.com/office/drawing/2014/main" id="{758DFA64-1ED6-4FFE-B07F-021B4C354B78}"/>
               </a:ext>
             </a:extLst>
           </p:cNvPr>
@@ -10120,7 +10128,7 @@
           <p:cNvPr id="3" name="">
             <a:extLst xmlns:a="http://schemas.openxmlformats.org/drawingml/2006/main">
               <a:ext uri="{FF2B5EF4-FFF2-40B4-BE49-F238E27FC236}">
-                <a16:creationId xmlns:a16="http://schemas.microsoft.com/office/drawing/2014/main" id="{708ED81E-2296-4AA1-BA84-B102214B0BB4}"/>
+                <a16:creationId xmlns:a16="http://schemas.microsoft.com/office/drawing/2014/main" id="{3EB4DE0C-3329-4D07-B027-42836B5622AE}"/>
               </a:ext>
             </a:extLst>
           </p:cNvPr>
@@ -10152,7 +10160,7 @@
           <p:cNvPr id="4" name="">
             <a:extLst xmlns:a="http://schemas.openxmlformats.org/drawingml/2006/main">
               <a:ext uri="{FF2B5EF4-FFF2-40B4-BE49-F238E27FC236}">
-                <a16:creationId xmlns:a16="http://schemas.microsoft.com/office/drawing/2014/main" id="{32EC0B8A-BD51-4271-86B0-87E9795C1CDB}"/>
+                <a16:creationId xmlns:a16="http://schemas.microsoft.com/office/drawing/2014/main" id="{29CD2006-2E45-4E84-9C98-9039F065346E}"/>
               </a:ext>
             </a:extLst>
           </p:cNvPr>
@@ -10209,7 +10217,7 @@
           <p:cNvPr id="5" name="">
             <a:extLst xmlns:a="http://schemas.openxmlformats.org/drawingml/2006/main">
               <a:ext uri="{FF2B5EF4-FFF2-40B4-BE49-F238E27FC236}">
-                <a16:creationId xmlns:a16="http://schemas.microsoft.com/office/drawing/2014/main" id="{A2E3D2AE-D5D8-4C37-A53F-02186A5248DB}"/>
+                <a16:creationId xmlns:a16="http://schemas.microsoft.com/office/drawing/2014/main" id="{D21A50D6-37FF-4E39-A2EA-42057A464802}"/>
               </a:ext>
             </a:extLst>
           </p:cNvPr>
@@ -10266,7 +10274,7 @@
           <p:cNvPr id="6" name="">
             <a:extLst xmlns:a="http://schemas.openxmlformats.org/drawingml/2006/main">
               <a:ext uri="{FF2B5EF4-FFF2-40B4-BE49-F238E27FC236}">
-                <a16:creationId xmlns:a16="http://schemas.microsoft.com/office/drawing/2014/main" id="{D76E6A9B-71E2-4081-BAE9-4E724BFF50BC}"/>
+                <a16:creationId xmlns:a16="http://schemas.microsoft.com/office/drawing/2014/main" id="{0E8DB3DE-88CF-4BA1-9996-39F81B551E35}"/>
               </a:ext>
             </a:extLst>
           </p:cNvPr>
@@ -10323,7 +10331,7 @@
           <p:cNvPr id="7" name="">
             <a:extLst xmlns:a="http://schemas.openxmlformats.org/drawingml/2006/main">
               <a:ext uri="{FF2B5EF4-FFF2-40B4-BE49-F238E27FC236}">
-                <a16:creationId xmlns:a16="http://schemas.microsoft.com/office/drawing/2014/main" id="{2FB265E4-8C39-4A33-951B-D2166165EC80}"/>
+                <a16:creationId xmlns:a16="http://schemas.microsoft.com/office/drawing/2014/main" id="{C81AD4B8-4B04-457A-80FE-A3267D8453AE}"/>
               </a:ext>
             </a:extLst>
           </p:cNvPr>
@@ -10355,7 +10363,7 @@
           <p:cNvPr id="8" name="">
             <a:extLst xmlns:a="http://schemas.openxmlformats.org/drawingml/2006/main">
               <a:ext uri="{FF2B5EF4-FFF2-40B4-BE49-F238E27FC236}">
-                <a16:creationId xmlns:a16="http://schemas.microsoft.com/office/drawing/2014/main" id="{078FC6DE-FAD2-47D8-B310-1D82F6ACCEAB}"/>
+                <a16:creationId xmlns:a16="http://schemas.microsoft.com/office/drawing/2014/main" id="{9DA1DC9E-20C0-4660-9E3C-B01DB3D8F5CD}"/>
               </a:ext>
             </a:extLst>
           </p:cNvPr>
@@ -10412,7 +10420,7 @@
           <p:cNvPr id="9" name="">
             <a:extLst xmlns:a="http://schemas.openxmlformats.org/drawingml/2006/main">
               <a:ext uri="{FF2B5EF4-FFF2-40B4-BE49-F238E27FC236}">
-                <a16:creationId xmlns:a16="http://schemas.microsoft.com/office/drawing/2014/main" id="{98EA8023-0FA2-4453-8638-53585FA73599}"/>
+                <a16:creationId xmlns:a16="http://schemas.microsoft.com/office/drawing/2014/main" id="{BB779FAA-D254-4DE9-92A8-273FF0433F99}"/>
               </a:ext>
             </a:extLst>
           </p:cNvPr>
@@ -10469,7 +10477,7 @@
           <p:cNvPr id="10" name="">
             <a:extLst xmlns:a="http://schemas.openxmlformats.org/drawingml/2006/main">
               <a:ext uri="{FF2B5EF4-FFF2-40B4-BE49-F238E27FC236}">
-                <a16:creationId xmlns:a16="http://schemas.microsoft.com/office/drawing/2014/main" id="{8421416B-C02E-47D4-BF53-C6AA9E48F4A3}"/>
+                <a16:creationId xmlns:a16="http://schemas.microsoft.com/office/drawing/2014/main" id="{950F692F-CE39-4746-9408-91D39C745450}"/>
               </a:ext>
             </a:extLst>
           </p:cNvPr>
@@ -10526,7 +10534,7 @@
           <p:cNvPr id="11" name="">
             <a:extLst xmlns:a="http://schemas.openxmlformats.org/drawingml/2006/main">
               <a:ext uri="{FF2B5EF4-FFF2-40B4-BE49-F238E27FC236}">
-                <a16:creationId xmlns:a16="http://schemas.microsoft.com/office/drawing/2014/main" id="{F0010792-53D5-43A0-973A-1F571F79FC5D}"/>
+                <a16:creationId xmlns:a16="http://schemas.microsoft.com/office/drawing/2014/main" id="{B0B75D4F-08B4-4A73-9BBE-1A76B3830FED}"/>
               </a:ext>
             </a:extLst>
           </p:cNvPr>
@@ -10583,7 +10591,7 @@
           <p:cNvPr id="12" name="">
             <a:extLst xmlns:a="http://schemas.openxmlformats.org/drawingml/2006/main">
               <a:ext uri="{FF2B5EF4-FFF2-40B4-BE49-F238E27FC236}">
-                <a16:creationId xmlns:a16="http://schemas.microsoft.com/office/drawing/2014/main" id="{0B3D7489-1A47-4C73-B4F1-0AEAF352FA77}"/>
+                <a16:creationId xmlns:a16="http://schemas.microsoft.com/office/drawing/2014/main" id="{A763CDD4-CCDE-4237-898D-CCB1AAB97E15}"/>
               </a:ext>
             </a:extLst>
           </p:cNvPr>
@@ -10640,7 +10648,7 @@
           <p:cNvPr id="13" name="">
             <a:extLst xmlns:a="http://schemas.openxmlformats.org/drawingml/2006/main">
               <a:ext uri="{FF2B5EF4-FFF2-40B4-BE49-F238E27FC236}">
-                <a16:creationId xmlns:a16="http://schemas.microsoft.com/office/drawing/2014/main" id="{C79BE6F3-4282-411A-A7A3-C68CB7EF3516}"/>
+                <a16:creationId xmlns:a16="http://schemas.microsoft.com/office/drawing/2014/main" id="{C30B0A3C-1179-4BDE-9001-855C1F2F1898}"/>
               </a:ext>
             </a:extLst>
           </p:cNvPr>
@@ -10697,7 +10705,7 @@
           <p:cNvPr id="14" name="">
             <a:extLst xmlns:a="http://schemas.openxmlformats.org/drawingml/2006/main">
               <a:ext uri="{FF2B5EF4-FFF2-40B4-BE49-F238E27FC236}">
-                <a16:creationId xmlns:a16="http://schemas.microsoft.com/office/drawing/2014/main" id="{34928D9C-82C9-46ED-B8AD-A2C889ED2253}"/>
+                <a16:creationId xmlns:a16="http://schemas.microsoft.com/office/drawing/2014/main" id="{397DD68F-5B35-4AED-A2C0-E74BD6390748}"/>
               </a:ext>
             </a:extLst>
           </p:cNvPr>
@@ -10754,7 +10762,7 @@
           <p:cNvPr id="15" name="">
             <a:extLst xmlns:a="http://schemas.openxmlformats.org/drawingml/2006/main">
               <a:ext uri="{FF2B5EF4-FFF2-40B4-BE49-F238E27FC236}">
-                <a16:creationId xmlns:a16="http://schemas.microsoft.com/office/drawing/2014/main" id="{AA011C02-3D94-4B28-8E4F-0495AAB07025}"/>
+                <a16:creationId xmlns:a16="http://schemas.microsoft.com/office/drawing/2014/main" id="{A58991F4-F905-4EE2-9B56-98CD4878E4A6}"/>
               </a:ext>
             </a:extLst>
           </p:cNvPr>
@@ -10809,7 +10817,7 @@
     </p:spTree>
     <p:extLst>
       <p:ext uri="{BB962C8B-B14F-4D97-AF65-F5344CB8AC3E}">
-        <p14:creationId xmlns:p14="http://schemas.microsoft.com/office/powerpoint/2010/main" val="1239647977"/>
+        <p14:creationId xmlns:p14="http://schemas.microsoft.com/office/powerpoint/2010/main" val="152052986"/>
       </p:ext>
     </p:extLst>
   </p:cSld>
@@ -10964,7 +10972,7 @@
           <p:cNvPr id="16" name="">
             <a:extLst xmlns:a="http://schemas.openxmlformats.org/drawingml/2006/main">
               <a:ext uri="{FF2B5EF4-FFF2-40B4-BE49-F238E27FC236}">
-                <a16:creationId xmlns:a16="http://schemas.microsoft.com/office/drawing/2014/main" id="{3EE6F8FD-7CA5-4FB0-8E46-E499FF2C703F}"/>
+                <a16:creationId xmlns:a16="http://schemas.microsoft.com/office/drawing/2014/main" id="{4C80CBBE-9CBA-4FA0-A85C-884C0A3D5140}"/>
               </a:ext>
             </a:extLst>
           </p:cNvPr>
@@ -10996,7 +11004,7 @@
           <p:cNvPr id="2" name="">
             <a:extLst xmlns:a="http://schemas.openxmlformats.org/drawingml/2006/main">
               <a:ext uri="{FF2B5EF4-FFF2-40B4-BE49-F238E27FC236}">
-                <a16:creationId xmlns:a16="http://schemas.microsoft.com/office/drawing/2014/main" id="{3ADF7AC4-F6E9-4065-A095-B1ED41DA9318}"/>
+                <a16:creationId xmlns:a16="http://schemas.microsoft.com/office/drawing/2014/main" id="{EB28205A-1C1F-4897-A5F4-2785A0D86A1A}"/>
               </a:ext>
             </a:extLst>
           </p:cNvPr>
@@ -11053,7 +11061,7 @@
           <p:cNvPr id="3" name="">
             <a:extLst xmlns:a="http://schemas.openxmlformats.org/drawingml/2006/main">
               <a:ext uri="{FF2B5EF4-FFF2-40B4-BE49-F238E27FC236}">
-                <a16:creationId xmlns:a16="http://schemas.microsoft.com/office/drawing/2014/main" id="{A103FD8F-4C28-4874-B126-AEC6C6604871}"/>
+                <a16:creationId xmlns:a16="http://schemas.microsoft.com/office/drawing/2014/main" id="{FF6DD2FF-30BD-4E27-9518-3C1C09DBFC5E}"/>
               </a:ext>
             </a:extLst>
           </p:cNvPr>
@@ -11085,7 +11093,7 @@
           <p:cNvPr id="4" name="">
             <a:extLst xmlns:a="http://schemas.openxmlformats.org/drawingml/2006/main">
               <a:ext uri="{FF2B5EF4-FFF2-40B4-BE49-F238E27FC236}">
-                <a16:creationId xmlns:a16="http://schemas.microsoft.com/office/drawing/2014/main" id="{6414C38A-C86B-445C-AC65-FBE1C1933859}"/>
+                <a16:creationId xmlns:a16="http://schemas.microsoft.com/office/drawing/2014/main" id="{C92082D1-18E7-4B49-BD5E-680EA01191AC}"/>
               </a:ext>
             </a:extLst>
           </p:cNvPr>
@@ -11142,7 +11150,7 @@
           <p:cNvPr id="5" name="">
             <a:extLst xmlns:a="http://schemas.openxmlformats.org/drawingml/2006/main">
               <a:ext uri="{FF2B5EF4-FFF2-40B4-BE49-F238E27FC236}">
-                <a16:creationId xmlns:a16="http://schemas.microsoft.com/office/drawing/2014/main" id="{DE20E756-E2F2-4EF8-BA7B-43C031F7D32C}"/>
+                <a16:creationId xmlns:a16="http://schemas.microsoft.com/office/drawing/2014/main" id="{1CDC7B73-57E7-48BA-950D-CA72742240CD}"/>
               </a:ext>
             </a:extLst>
           </p:cNvPr>
@@ -11199,7 +11207,7 @@
           <p:cNvPr id="6" name="">
             <a:extLst xmlns:a="http://schemas.openxmlformats.org/drawingml/2006/main">
               <a:ext uri="{FF2B5EF4-FFF2-40B4-BE49-F238E27FC236}">
-                <a16:creationId xmlns:a16="http://schemas.microsoft.com/office/drawing/2014/main" id="{9A54601C-13C8-40D1-98F0-DA503ADA45AD}"/>
+                <a16:creationId xmlns:a16="http://schemas.microsoft.com/office/drawing/2014/main" id="{60513464-8159-4617-888F-AF69B3FA18C6}"/>
               </a:ext>
             </a:extLst>
           </p:cNvPr>
@@ -11256,7 +11264,7 @@
           <p:cNvPr id="7" name="">
             <a:extLst xmlns:a="http://schemas.openxmlformats.org/drawingml/2006/main">
               <a:ext uri="{FF2B5EF4-FFF2-40B4-BE49-F238E27FC236}">
-                <a16:creationId xmlns:a16="http://schemas.microsoft.com/office/drawing/2014/main" id="{C6C39EF0-DC49-4ED8-91D9-4033FA04526F}"/>
+                <a16:creationId xmlns:a16="http://schemas.microsoft.com/office/drawing/2014/main" id="{0BED239A-EB2D-4942-AEA9-9CBC9CF525D3}"/>
               </a:ext>
             </a:extLst>
           </p:cNvPr>
@@ -11288,7 +11296,7 @@
           <p:cNvPr id="8" name="">
             <a:extLst xmlns:a="http://schemas.openxmlformats.org/drawingml/2006/main">
               <a:ext uri="{FF2B5EF4-FFF2-40B4-BE49-F238E27FC236}">
-                <a16:creationId xmlns:a16="http://schemas.microsoft.com/office/drawing/2014/main" id="{037EC258-C647-4489-93A3-C9735F1F154E}"/>
+                <a16:creationId xmlns:a16="http://schemas.microsoft.com/office/drawing/2014/main" id="{AE151E7A-C791-4EF7-9E1A-5571AFDC9D15}"/>
               </a:ext>
             </a:extLst>
           </p:cNvPr>
@@ -11345,7 +11353,7 @@
           <p:cNvPr id="9" name="">
             <a:extLst xmlns:a="http://schemas.openxmlformats.org/drawingml/2006/main">
               <a:ext uri="{FF2B5EF4-FFF2-40B4-BE49-F238E27FC236}">
-                <a16:creationId xmlns:a16="http://schemas.microsoft.com/office/drawing/2014/main" id="{82E496FC-5340-4C84-A0E7-F2D7CE9C6E07}"/>
+                <a16:creationId xmlns:a16="http://schemas.microsoft.com/office/drawing/2014/main" id="{7A6BB5A5-A6F6-426A-B7A7-799EC4E8CECB}"/>
               </a:ext>
             </a:extLst>
           </p:cNvPr>
@@ -11406,7 +11414,7 @@
           <p:nvPr/>
         </p:nvPicPr>
         <p:blipFill>
-          <a:blip xmlns:r="http://schemas.openxmlformats.org/officeDocument/2006/relationships" xmlns:a="http://schemas.openxmlformats.org/drawingml/2006/main" r:embed="R21a2f672e7fb42be"/>
+          <a:blip xmlns:r="http://schemas.openxmlformats.org/officeDocument/2006/relationships" xmlns:a="http://schemas.openxmlformats.org/drawingml/2006/main" r:embed="Rf5c01f339aa740b4"/>
           <a:stretch xmlns:a="http://schemas.openxmlformats.org/drawingml/2006/main"/>
         </p:blipFill>
         <p:spPr>
@@ -11424,7 +11432,7 @@
           <p:cNvPr id="11" name="">
             <a:extLst xmlns:a="http://schemas.openxmlformats.org/drawingml/2006/main">
               <a:ext uri="{FF2B5EF4-FFF2-40B4-BE49-F238E27FC236}">
-                <a16:creationId xmlns:a16="http://schemas.microsoft.com/office/drawing/2014/main" id="{97578D1A-8AED-42A0-A575-AF927FC1EFF6}"/>
+                <a16:creationId xmlns:a16="http://schemas.microsoft.com/office/drawing/2014/main" id="{FAC409E1-480D-4FF9-A432-BC1D27AA539C}"/>
               </a:ext>
             </a:extLst>
           </p:cNvPr>
@@ -11481,7 +11489,7 @@
           <p:cNvPr id="12" name="">
             <a:extLst xmlns:a="http://schemas.openxmlformats.org/drawingml/2006/main">
               <a:ext uri="{FF2B5EF4-FFF2-40B4-BE49-F238E27FC236}">
-                <a16:creationId xmlns:a16="http://schemas.microsoft.com/office/drawing/2014/main" id="{9437AAD5-7DA8-47DF-BF40-E8742034B294}"/>
+                <a16:creationId xmlns:a16="http://schemas.microsoft.com/office/drawing/2014/main" id="{DEB512AF-9BDE-4100-AF20-A0BB0B07FCFF}"/>
               </a:ext>
             </a:extLst>
           </p:cNvPr>
@@ -11538,7 +11546,7 @@
           <p:cNvPr id="13" name="">
             <a:extLst xmlns:a="http://schemas.openxmlformats.org/drawingml/2006/main">
               <a:ext uri="{FF2B5EF4-FFF2-40B4-BE49-F238E27FC236}">
-                <a16:creationId xmlns:a16="http://schemas.microsoft.com/office/drawing/2014/main" id="{599C40A1-9243-4AC4-90FE-D3F5E493CB6D}"/>
+                <a16:creationId xmlns:a16="http://schemas.microsoft.com/office/drawing/2014/main" id="{5B584719-2C4E-483B-A667-A9D1F9E4A7DF}"/>
               </a:ext>
             </a:extLst>
           </p:cNvPr>
@@ -11570,7 +11578,7 @@
           <p:cNvPr id="14" name="">
             <a:extLst xmlns:a="http://schemas.openxmlformats.org/drawingml/2006/main">
               <a:ext uri="{FF2B5EF4-FFF2-40B4-BE49-F238E27FC236}">
-                <a16:creationId xmlns:a16="http://schemas.microsoft.com/office/drawing/2014/main" id="{7D35AC46-AFF9-4C0C-80F8-C90AA683A3FC}"/>
+                <a16:creationId xmlns:a16="http://schemas.microsoft.com/office/drawing/2014/main" id="{D3203746-E241-4029-B394-81DC392341D7}"/>
               </a:ext>
             </a:extLst>
           </p:cNvPr>
@@ -11627,7 +11635,7 @@
           <p:cNvPr id="15" name="">
             <a:extLst xmlns:a="http://schemas.openxmlformats.org/drawingml/2006/main">
               <a:ext uri="{FF2B5EF4-FFF2-40B4-BE49-F238E27FC236}">
-                <a16:creationId xmlns:a16="http://schemas.microsoft.com/office/drawing/2014/main" id="{ADD99287-9F57-43B6-8FDB-AD2A73A005E9}"/>
+                <a16:creationId xmlns:a16="http://schemas.microsoft.com/office/drawing/2014/main" id="{C2B7B82D-FCA7-406D-9763-2C267B9B0269}"/>
               </a:ext>
             </a:extLst>
           </p:cNvPr>
@@ -11682,7 +11690,7 @@
     </p:spTree>
     <p:extLst>
       <p:ext uri="{BB962C8B-B14F-4D97-AF65-F5344CB8AC3E}">
-        <p14:creationId xmlns:p14="http://schemas.microsoft.com/office/powerpoint/2010/main" val="2002662699"/>
+        <p14:creationId xmlns:p14="http://schemas.microsoft.com/office/powerpoint/2010/main" val="1762405766"/>
       </p:ext>
     </p:extLst>
   </p:cSld>
@@ -11837,7 +11845,7 @@
           <p:cNvPr id="23" name="">
             <a:extLst xmlns:a="http://schemas.openxmlformats.org/drawingml/2006/main">
               <a:ext uri="{FF2B5EF4-FFF2-40B4-BE49-F238E27FC236}">
-                <a16:creationId xmlns:a16="http://schemas.microsoft.com/office/drawing/2014/main" id="{B8B0D0BB-8EC0-4928-A530-80406317938D}"/>
+                <a16:creationId xmlns:a16="http://schemas.microsoft.com/office/drawing/2014/main" id="{FA03B7BC-4905-443E-A223-0C9910CC1A08}"/>
               </a:ext>
             </a:extLst>
           </p:cNvPr>
@@ -11869,7 +11877,7 @@
           <p:cNvPr id="2" name="">
             <a:extLst xmlns:a="http://schemas.openxmlformats.org/drawingml/2006/main">
               <a:ext uri="{FF2B5EF4-FFF2-40B4-BE49-F238E27FC236}">
-                <a16:creationId xmlns:a16="http://schemas.microsoft.com/office/drawing/2014/main" id="{B8ACAC76-AA36-40FA-A398-5C0F1969F990}"/>
+                <a16:creationId xmlns:a16="http://schemas.microsoft.com/office/drawing/2014/main" id="{418EDD1D-0DB2-4FC6-A97F-4A14540A7D19}"/>
               </a:ext>
             </a:extLst>
           </p:cNvPr>
@@ -11926,7 +11934,7 @@
           <p:cNvPr id="3" name="">
             <a:extLst xmlns:a="http://schemas.openxmlformats.org/drawingml/2006/main">
               <a:ext uri="{FF2B5EF4-FFF2-40B4-BE49-F238E27FC236}">
-                <a16:creationId xmlns:a16="http://schemas.microsoft.com/office/drawing/2014/main" id="{2EB8341E-B02B-4DE1-BD36-B9F276DD957D}"/>
+                <a16:creationId xmlns:a16="http://schemas.microsoft.com/office/drawing/2014/main" id="{57E4C0CC-971E-472F-9953-B2FF2AD0B4F2}"/>
               </a:ext>
             </a:extLst>
           </p:cNvPr>
@@ -11958,7 +11966,7 @@
           <p:cNvPr id="4" name="">
             <a:extLst xmlns:a="http://schemas.openxmlformats.org/drawingml/2006/main">
               <a:ext uri="{FF2B5EF4-FFF2-40B4-BE49-F238E27FC236}">
-                <a16:creationId xmlns:a16="http://schemas.microsoft.com/office/drawing/2014/main" id="{5D8DAAC4-FF66-4214-836F-E4178B04BC99}"/>
+                <a16:creationId xmlns:a16="http://schemas.microsoft.com/office/drawing/2014/main" id="{5D135C1D-FA36-4526-8D55-85BA7D994B90}"/>
               </a:ext>
             </a:extLst>
           </p:cNvPr>
@@ -12015,7 +12023,7 @@
           <p:cNvPr id="5" name="">
             <a:extLst xmlns:a="http://schemas.openxmlformats.org/drawingml/2006/main">
               <a:ext uri="{FF2B5EF4-FFF2-40B4-BE49-F238E27FC236}">
-                <a16:creationId xmlns:a16="http://schemas.microsoft.com/office/drawing/2014/main" id="{358AE71F-EFF2-4814-89D0-25E4090152C3}"/>
+                <a16:creationId xmlns:a16="http://schemas.microsoft.com/office/drawing/2014/main" id="{95C90126-5124-4D26-8E8F-4843CD825845}"/>
               </a:ext>
             </a:extLst>
           </p:cNvPr>
@@ -12072,7 +12080,7 @@
           <p:cNvPr id="6" name="">
             <a:extLst xmlns:a="http://schemas.openxmlformats.org/drawingml/2006/main">
               <a:ext uri="{FF2B5EF4-FFF2-40B4-BE49-F238E27FC236}">
-                <a16:creationId xmlns:a16="http://schemas.microsoft.com/office/drawing/2014/main" id="{3732C2E3-7779-4C36-80A0-E23814C0FA8E}"/>
+                <a16:creationId xmlns:a16="http://schemas.microsoft.com/office/drawing/2014/main" id="{9BC4D434-DAF9-41E7-9392-B61E27C92842}"/>
               </a:ext>
             </a:extLst>
           </p:cNvPr>
@@ -12129,7 +12137,7 @@
           <p:cNvPr id="7" name="">
             <a:extLst xmlns:a="http://schemas.openxmlformats.org/drawingml/2006/main">
               <a:ext uri="{FF2B5EF4-FFF2-40B4-BE49-F238E27FC236}">
-                <a16:creationId xmlns:a16="http://schemas.microsoft.com/office/drawing/2014/main" id="{940F234D-360F-4573-910A-B2832EAB4ED3}"/>
+                <a16:creationId xmlns:a16="http://schemas.microsoft.com/office/drawing/2014/main" id="{0B0C4418-8F81-45AF-9CB1-2F81D86CE6F8}"/>
               </a:ext>
             </a:extLst>
           </p:cNvPr>
@@ -12161,7 +12169,7 @@
           <p:cNvPr id="8" name="">
             <a:extLst xmlns:a="http://schemas.openxmlformats.org/drawingml/2006/main">
               <a:ext uri="{FF2B5EF4-FFF2-40B4-BE49-F238E27FC236}">
-                <a16:creationId xmlns:a16="http://schemas.microsoft.com/office/drawing/2014/main" id="{6A7FC720-410F-4B14-BFC9-A69D0AB6BC2C}"/>
+                <a16:creationId xmlns:a16="http://schemas.microsoft.com/office/drawing/2014/main" id="{22897542-B2DA-49AA-BEA3-4329757A4CC2}"/>
               </a:ext>
             </a:extLst>
           </p:cNvPr>
@@ -12218,7 +12226,7 @@
           <p:cNvPr id="9" name="">
             <a:extLst xmlns:a="http://schemas.openxmlformats.org/drawingml/2006/main">
               <a:ext uri="{FF2B5EF4-FFF2-40B4-BE49-F238E27FC236}">
-                <a16:creationId xmlns:a16="http://schemas.microsoft.com/office/drawing/2014/main" id="{39EDFBD7-8616-4EE8-91DC-77B4D61162D4}"/>
+                <a16:creationId xmlns:a16="http://schemas.microsoft.com/office/drawing/2014/main" id="{D1C449D5-4D6C-4EE6-9AC5-0249D7DAA7C7}"/>
               </a:ext>
             </a:extLst>
           </p:cNvPr>
@@ -12275,7 +12283,7 @@
           <p:cNvPr id="10" name="">
             <a:extLst xmlns:a="http://schemas.openxmlformats.org/drawingml/2006/main">
               <a:ext uri="{FF2B5EF4-FFF2-40B4-BE49-F238E27FC236}">
-                <a16:creationId xmlns:a16="http://schemas.microsoft.com/office/drawing/2014/main" id="{4CD01E37-CACF-4471-AEDC-ABF6838317C6}"/>
+                <a16:creationId xmlns:a16="http://schemas.microsoft.com/office/drawing/2014/main" id="{9969442E-9827-4E0E-AE91-4C90B7A267A1}"/>
               </a:ext>
             </a:extLst>
           </p:cNvPr>
@@ -12309,7 +12317,7 @@
           <p:cNvPr id="11" name="">
             <a:extLst xmlns:a="http://schemas.openxmlformats.org/drawingml/2006/main">
               <a:ext uri="{FF2B5EF4-FFF2-40B4-BE49-F238E27FC236}">
-                <a16:creationId xmlns:a16="http://schemas.microsoft.com/office/drawing/2014/main" id="{71B4157A-15DB-4305-8A96-C71FD3EC2246}"/>
+                <a16:creationId xmlns:a16="http://schemas.microsoft.com/office/drawing/2014/main" id="{99325831-6E0D-434B-AFF8-23BCE6F55671}"/>
               </a:ext>
             </a:extLst>
           </p:cNvPr>
@@ -12341,7 +12349,7 @@
           <p:cNvPr id="12" name="">
             <a:extLst xmlns:a="http://schemas.openxmlformats.org/drawingml/2006/main">
               <a:ext uri="{FF2B5EF4-FFF2-40B4-BE49-F238E27FC236}">
-                <a16:creationId xmlns:a16="http://schemas.microsoft.com/office/drawing/2014/main" id="{B9ABBC8F-FEE6-4945-822B-0C711A10E1C4}"/>
+                <a16:creationId xmlns:a16="http://schemas.microsoft.com/office/drawing/2014/main" id="{A8086FC1-74CB-46E5-9236-33FCC4815AE1}"/>
               </a:ext>
             </a:extLst>
           </p:cNvPr>
@@ -12398,7 +12406,7 @@
           <p:cNvPr id="13" name="">
             <a:extLst xmlns:a="http://schemas.openxmlformats.org/drawingml/2006/main">
               <a:ext uri="{FF2B5EF4-FFF2-40B4-BE49-F238E27FC236}">
-                <a16:creationId xmlns:a16="http://schemas.microsoft.com/office/drawing/2014/main" id="{92EA30AE-3266-4171-8AA4-8F4FC7B3B117}"/>
+                <a16:creationId xmlns:a16="http://schemas.microsoft.com/office/drawing/2014/main" id="{06E3E731-5090-4287-B5E8-26FC67921FF1}"/>
               </a:ext>
             </a:extLst>
           </p:cNvPr>
@@ -12455,7 +12463,7 @@
           <p:cNvPr id="14" name="">
             <a:extLst xmlns:a="http://schemas.openxmlformats.org/drawingml/2006/main">
               <a:ext uri="{FF2B5EF4-FFF2-40B4-BE49-F238E27FC236}">
-                <a16:creationId xmlns:a16="http://schemas.microsoft.com/office/drawing/2014/main" id="{DC841966-2F03-4F31-BE60-620E63A096C4}"/>
+                <a16:creationId xmlns:a16="http://schemas.microsoft.com/office/drawing/2014/main" id="{BD899192-DF57-4CAF-B18E-800DDB3DDCF9}"/>
               </a:ext>
             </a:extLst>
           </p:cNvPr>
@@ -12489,7 +12497,7 @@
           <p:cNvPr id="15" name="">
             <a:extLst xmlns:a="http://schemas.openxmlformats.org/drawingml/2006/main">
               <a:ext uri="{FF2B5EF4-FFF2-40B4-BE49-F238E27FC236}">
-                <a16:creationId xmlns:a16="http://schemas.microsoft.com/office/drawing/2014/main" id="{2C05F2C8-3444-4E88-A444-CAAE76802D2C}"/>
+                <a16:creationId xmlns:a16="http://schemas.microsoft.com/office/drawing/2014/main" id="{316BE98A-4C7A-4D4A-9D1E-F1827D3FF657}"/>
               </a:ext>
             </a:extLst>
           </p:cNvPr>
@@ -12521,7 +12529,7 @@
           <p:cNvPr id="16" name="">
             <a:extLst xmlns:a="http://schemas.openxmlformats.org/drawingml/2006/main">
               <a:ext uri="{FF2B5EF4-FFF2-40B4-BE49-F238E27FC236}">
-                <a16:creationId xmlns:a16="http://schemas.microsoft.com/office/drawing/2014/main" id="{79E44B9F-2ACD-4A19-8686-2430532ECE0F}"/>
+                <a16:creationId xmlns:a16="http://schemas.microsoft.com/office/drawing/2014/main" id="{C6BAEB1F-A0D3-4F49-A5C6-5CE25413A963}"/>
               </a:ext>
             </a:extLst>
           </p:cNvPr>
@@ -12578,7 +12586,7 @@
           <p:cNvPr id="17" name="">
             <a:extLst xmlns:a="http://schemas.openxmlformats.org/drawingml/2006/main">
               <a:ext uri="{FF2B5EF4-FFF2-40B4-BE49-F238E27FC236}">
-                <a16:creationId xmlns:a16="http://schemas.microsoft.com/office/drawing/2014/main" id="{9EF7C524-E8BC-48A1-B430-1F38905C8E03}"/>
+                <a16:creationId xmlns:a16="http://schemas.microsoft.com/office/drawing/2014/main" id="{01A9047C-FA6B-42F7-BE71-22C9AA104795}"/>
               </a:ext>
             </a:extLst>
           </p:cNvPr>
@@ -12635,7 +12643,7 @@
           <p:cNvPr id="18" name="">
             <a:extLst xmlns:a="http://schemas.openxmlformats.org/drawingml/2006/main">
               <a:ext uri="{FF2B5EF4-FFF2-40B4-BE49-F238E27FC236}">
-                <a16:creationId xmlns:a16="http://schemas.microsoft.com/office/drawing/2014/main" id="{7503CE35-C46D-4B11-B9ED-D9B345C7433F}"/>
+                <a16:creationId xmlns:a16="http://schemas.microsoft.com/office/drawing/2014/main" id="{9C57CBCA-22C5-4AC5-BF5F-08DCA9F4A45A}"/>
               </a:ext>
             </a:extLst>
           </p:cNvPr>
@@ -12669,7 +12677,7 @@
           <p:cNvPr id="19" name="">
             <a:extLst xmlns:a="http://schemas.openxmlformats.org/drawingml/2006/main">
               <a:ext uri="{FF2B5EF4-FFF2-40B4-BE49-F238E27FC236}">
-                <a16:creationId xmlns:a16="http://schemas.microsoft.com/office/drawing/2014/main" id="{CB68A898-AEB4-4F05-A49D-E67DBCD09F05}"/>
+                <a16:creationId xmlns:a16="http://schemas.microsoft.com/office/drawing/2014/main" id="{CC7D28AC-D2D8-4732-B487-F964D1723BD5}"/>
               </a:ext>
             </a:extLst>
           </p:cNvPr>
@@ -12701,7 +12709,7 @@
           <p:cNvPr id="20" name="">
             <a:extLst xmlns:a="http://schemas.openxmlformats.org/drawingml/2006/main">
               <a:ext uri="{FF2B5EF4-FFF2-40B4-BE49-F238E27FC236}">
-                <a16:creationId xmlns:a16="http://schemas.microsoft.com/office/drawing/2014/main" id="{59424F34-B8D0-4773-A2A4-7E0062DF28A6}"/>
+                <a16:creationId xmlns:a16="http://schemas.microsoft.com/office/drawing/2014/main" id="{955037E7-2F95-411D-A386-348F752D0FC9}"/>
               </a:ext>
             </a:extLst>
           </p:cNvPr>
@@ -12758,7 +12766,7 @@
           <p:cNvPr id="21" name="">
             <a:extLst xmlns:a="http://schemas.openxmlformats.org/drawingml/2006/main">
               <a:ext uri="{FF2B5EF4-FFF2-40B4-BE49-F238E27FC236}">
-                <a16:creationId xmlns:a16="http://schemas.microsoft.com/office/drawing/2014/main" id="{5C8CFF9C-A51C-49A9-93E2-873DF62ED697}"/>
+                <a16:creationId xmlns:a16="http://schemas.microsoft.com/office/drawing/2014/main" id="{FDE48763-7C77-45E2-BF9E-AC894C16F5CE}"/>
               </a:ext>
             </a:extLst>
           </p:cNvPr>
@@ -12815,7 +12823,7 @@
           <p:cNvPr id="22" name="">
             <a:extLst xmlns:a="http://schemas.openxmlformats.org/drawingml/2006/main">
               <a:ext uri="{FF2B5EF4-FFF2-40B4-BE49-F238E27FC236}">
-                <a16:creationId xmlns:a16="http://schemas.microsoft.com/office/drawing/2014/main" id="{1DBDDBA4-D744-4BC8-ADA3-A7137074261D}"/>
+                <a16:creationId xmlns:a16="http://schemas.microsoft.com/office/drawing/2014/main" id="{42E5514D-11B9-4D5A-AF84-338CCD74596C}"/>
               </a:ext>
             </a:extLst>
           </p:cNvPr>
@@ -12870,7 +12878,7 @@
     </p:spTree>
     <p:extLst>
       <p:ext uri="{BB962C8B-B14F-4D97-AF65-F5344CB8AC3E}">
-        <p14:creationId xmlns:p14="http://schemas.microsoft.com/office/powerpoint/2010/main" val="351585620"/>
+        <p14:creationId xmlns:p14="http://schemas.microsoft.com/office/powerpoint/2010/main" val="2112418106"/>
       </p:ext>
     </p:extLst>
   </p:cSld>
@@ -13071,7 +13079,7 @@
           <p:cNvPr id="22" name="">
             <a:extLst xmlns:a="http://schemas.openxmlformats.org/drawingml/2006/main">
               <a:ext uri="{FF2B5EF4-FFF2-40B4-BE49-F238E27FC236}">
-                <a16:creationId xmlns:a16="http://schemas.microsoft.com/office/drawing/2014/main" id="{E75F8D2C-5BA4-4C93-B0F9-C09CCA05A21F}"/>
+                <a16:creationId xmlns:a16="http://schemas.microsoft.com/office/drawing/2014/main" id="{6C7165AF-15D9-4285-8F22-5AF0A1EC3324}"/>
               </a:ext>
             </a:extLst>
           </p:cNvPr>
@@ -13103,7 +13111,7 @@
           <p:cNvPr id="2" name="">
             <a:extLst xmlns:a="http://schemas.openxmlformats.org/drawingml/2006/main">
               <a:ext uri="{FF2B5EF4-FFF2-40B4-BE49-F238E27FC236}">
-                <a16:creationId xmlns:a16="http://schemas.microsoft.com/office/drawing/2014/main" id="{F7906CCC-C94F-42D4-AA94-CC6B6B080FFA}"/>
+                <a16:creationId xmlns:a16="http://schemas.microsoft.com/office/drawing/2014/main" id="{1798EB4F-5DBF-45F0-9B7C-EC546FEA106D}"/>
               </a:ext>
             </a:extLst>
           </p:cNvPr>
@@ -13160,7 +13168,7 @@
           <p:cNvPr id="3" name="">
             <a:extLst xmlns:a="http://schemas.openxmlformats.org/drawingml/2006/main">
               <a:ext uri="{FF2B5EF4-FFF2-40B4-BE49-F238E27FC236}">
-                <a16:creationId xmlns:a16="http://schemas.microsoft.com/office/drawing/2014/main" id="{F004FB1F-FD58-4713-832E-785B1ACC0A43}"/>
+                <a16:creationId xmlns:a16="http://schemas.microsoft.com/office/drawing/2014/main" id="{A1CB918B-864A-406C-8E90-F48022D582C0}"/>
               </a:ext>
             </a:extLst>
           </p:cNvPr>
@@ -13192,7 +13200,7 @@
           <p:cNvPr id="4" name="">
             <a:extLst xmlns:a="http://schemas.openxmlformats.org/drawingml/2006/main">
               <a:ext uri="{FF2B5EF4-FFF2-40B4-BE49-F238E27FC236}">
-                <a16:creationId xmlns:a16="http://schemas.microsoft.com/office/drawing/2014/main" id="{6EECBE8A-3EAC-4B3E-80C2-4F735BE571E5}"/>
+                <a16:creationId xmlns:a16="http://schemas.microsoft.com/office/drawing/2014/main" id="{2B7EFDAF-5C16-4D0E-903F-C58B6A9FD2CC}"/>
               </a:ext>
             </a:extLst>
           </p:cNvPr>
@@ -13249,7 +13257,7 @@
           <p:cNvPr id="5" name="">
             <a:extLst xmlns:a="http://schemas.openxmlformats.org/drawingml/2006/main">
               <a:ext uri="{FF2B5EF4-FFF2-40B4-BE49-F238E27FC236}">
-                <a16:creationId xmlns:a16="http://schemas.microsoft.com/office/drawing/2014/main" id="{BD3484CB-3B49-4A5B-87E2-251A4E808B0C}"/>
+                <a16:creationId xmlns:a16="http://schemas.microsoft.com/office/drawing/2014/main" id="{8273D507-BDF9-44C4-9FA8-F5291BEE43F5}"/>
               </a:ext>
             </a:extLst>
           </p:cNvPr>
@@ -13306,7 +13314,7 @@
           <p:cNvPr id="6" name="">
             <a:extLst xmlns:a="http://schemas.openxmlformats.org/drawingml/2006/main">
               <a:ext uri="{FF2B5EF4-FFF2-40B4-BE49-F238E27FC236}">
-                <a16:creationId xmlns:a16="http://schemas.microsoft.com/office/drawing/2014/main" id="{1844B2C0-07A8-4169-9240-E1527129E22D}"/>
+                <a16:creationId xmlns:a16="http://schemas.microsoft.com/office/drawing/2014/main" id="{DC2FEC1D-2487-4E99-9BA4-F8A261856514}"/>
               </a:ext>
             </a:extLst>
           </p:cNvPr>
@@ -13363,7 +13371,7 @@
           <p:cNvPr id="7" name="">
             <a:extLst xmlns:a="http://schemas.openxmlformats.org/drawingml/2006/main">
               <a:ext uri="{FF2B5EF4-FFF2-40B4-BE49-F238E27FC236}">
-                <a16:creationId xmlns:a16="http://schemas.microsoft.com/office/drawing/2014/main" id="{CBD84856-75C5-4B56-96AC-906235EB445D}"/>
+                <a16:creationId xmlns:a16="http://schemas.microsoft.com/office/drawing/2014/main" id="{64CB009C-8CAE-404F-A88E-382081E5C478}"/>
               </a:ext>
             </a:extLst>
           </p:cNvPr>
@@ -13395,7 +13403,7 @@
           <p:cNvPr id="8" name="">
             <a:extLst xmlns:a="http://schemas.openxmlformats.org/drawingml/2006/main">
               <a:ext uri="{FF2B5EF4-FFF2-40B4-BE49-F238E27FC236}">
-                <a16:creationId xmlns:a16="http://schemas.microsoft.com/office/drawing/2014/main" id="{2E9A123A-D878-4B77-A029-8F6FC6A873E1}"/>
+                <a16:creationId xmlns:a16="http://schemas.microsoft.com/office/drawing/2014/main" id="{061C19B9-5CA9-42E0-9A93-5A0DE6CB58A3}"/>
               </a:ext>
             </a:extLst>
           </p:cNvPr>
@@ -13452,7 +13460,7 @@
           <p:cNvPr id="9" name="">
             <a:extLst xmlns:a="http://schemas.openxmlformats.org/drawingml/2006/main">
               <a:ext uri="{FF2B5EF4-FFF2-40B4-BE49-F238E27FC236}">
-                <a16:creationId xmlns:a16="http://schemas.microsoft.com/office/drawing/2014/main" id="{3127F2DD-4F0E-4388-B3AD-EBA479557DF8}"/>
+                <a16:creationId xmlns:a16="http://schemas.microsoft.com/office/drawing/2014/main" id="{4B5495FD-02A1-4841-BAD1-5AD0AB8048B4}"/>
               </a:ext>
             </a:extLst>
           </p:cNvPr>
@@ -13509,7 +13517,7 @@
           <p:cNvPr id="10" name="">
             <a:extLst xmlns:a="http://schemas.openxmlformats.org/drawingml/2006/main">
               <a:ext uri="{FF2B5EF4-FFF2-40B4-BE49-F238E27FC236}">
-                <a16:creationId xmlns:a16="http://schemas.microsoft.com/office/drawing/2014/main" id="{0AC1FCE1-BA8C-4F0C-B1C6-F5EC4FF9715B}"/>
+                <a16:creationId xmlns:a16="http://schemas.microsoft.com/office/drawing/2014/main" id="{D0C8960D-E4F2-4FC6-BD99-F3FAC79C92D2}"/>
               </a:ext>
             </a:extLst>
           </p:cNvPr>
@@ -13543,7 +13551,7 @@
           <p:cNvPr id="11" name="">
             <a:extLst xmlns:a="http://schemas.openxmlformats.org/drawingml/2006/main">
               <a:ext uri="{FF2B5EF4-FFF2-40B4-BE49-F238E27FC236}">
-                <a16:creationId xmlns:a16="http://schemas.microsoft.com/office/drawing/2014/main" id="{D5F10A80-122D-4D78-9735-777CA29BF203}"/>
+                <a16:creationId xmlns:a16="http://schemas.microsoft.com/office/drawing/2014/main" id="{A2894E0B-1422-4E3E-A3C8-53B51CCF685F}"/>
               </a:ext>
             </a:extLst>
           </p:cNvPr>
@@ -13575,7 +13583,7 @@
           <p:cNvPr id="12" name="">
             <a:extLst xmlns:a="http://schemas.openxmlformats.org/drawingml/2006/main">
               <a:ext uri="{FF2B5EF4-FFF2-40B4-BE49-F238E27FC236}">
-                <a16:creationId xmlns:a16="http://schemas.microsoft.com/office/drawing/2014/main" id="{184D5D21-9C53-46E1-B50E-144BE0EC839F}"/>
+                <a16:creationId xmlns:a16="http://schemas.microsoft.com/office/drawing/2014/main" id="{F5400C14-039B-4699-A5D7-BA96499B3F8E}"/>
               </a:ext>
             </a:extLst>
           </p:cNvPr>
@@ -13632,7 +13640,7 @@
           <p:cNvPr id="13" name="">
             <a:extLst xmlns:a="http://schemas.openxmlformats.org/drawingml/2006/main">
               <a:ext uri="{FF2B5EF4-FFF2-40B4-BE49-F238E27FC236}">
-                <a16:creationId xmlns:a16="http://schemas.microsoft.com/office/drawing/2014/main" id="{9595D09B-54CD-477E-91E6-921B18B7438C}"/>
+                <a16:creationId xmlns:a16="http://schemas.microsoft.com/office/drawing/2014/main" id="{ACC870F8-3B1D-4608-A573-E7F93FC26C8B}"/>
               </a:ext>
             </a:extLst>
           </p:cNvPr>
@@ -13689,7 +13697,7 @@
           <p:cNvPr id="14" name="">
             <a:extLst xmlns:a="http://schemas.openxmlformats.org/drawingml/2006/main">
               <a:ext uri="{FF2B5EF4-FFF2-40B4-BE49-F238E27FC236}">
-                <a16:creationId xmlns:a16="http://schemas.microsoft.com/office/drawing/2014/main" id="{8F2CBCA6-05CE-4BFB-BC9A-8D5B7139F6A9}"/>
+                <a16:creationId xmlns:a16="http://schemas.microsoft.com/office/drawing/2014/main" id="{989A18D0-C76D-478A-9B9F-93455E686176}"/>
               </a:ext>
             </a:extLst>
           </p:cNvPr>
@@ -13723,7 +13731,7 @@
           <p:cNvPr id="15" name="">
             <a:extLst xmlns:a="http://schemas.openxmlformats.org/drawingml/2006/main">
               <a:ext uri="{FF2B5EF4-FFF2-40B4-BE49-F238E27FC236}">
-                <a16:creationId xmlns:a16="http://schemas.microsoft.com/office/drawing/2014/main" id="{B6895AFD-E36C-4D45-ABD9-645F86E1AE91}"/>
+                <a16:creationId xmlns:a16="http://schemas.microsoft.com/office/drawing/2014/main" id="{66DA1CAE-4275-4D01-BF8A-E27D1F3DBBD3}"/>
               </a:ext>
             </a:extLst>
           </p:cNvPr>
@@ -13755,7 +13763,7 @@
           <p:cNvPr id="16" name="">
             <a:extLst xmlns:a="http://schemas.openxmlformats.org/drawingml/2006/main">
               <a:ext uri="{FF2B5EF4-FFF2-40B4-BE49-F238E27FC236}">
-                <a16:creationId xmlns:a16="http://schemas.microsoft.com/office/drawing/2014/main" id="{6F2C9049-8B78-4FA8-ABED-6A2A70CF4359}"/>
+                <a16:creationId xmlns:a16="http://schemas.microsoft.com/office/drawing/2014/main" id="{CCCFE4F3-F881-47C0-9D5A-3B664C3A1D0B}"/>
               </a:ext>
             </a:extLst>
           </p:cNvPr>
@@ -13812,7 +13820,7 @@
           <p:cNvPr id="17" name="">
             <a:extLst xmlns:a="http://schemas.openxmlformats.org/drawingml/2006/main">
               <a:ext uri="{FF2B5EF4-FFF2-40B4-BE49-F238E27FC236}">
-                <a16:creationId xmlns:a16="http://schemas.microsoft.com/office/drawing/2014/main" id="{C40422AB-1472-4984-B4A3-15B64CC8E30F}"/>
+                <a16:creationId xmlns:a16="http://schemas.microsoft.com/office/drawing/2014/main" id="{7D11EAEE-E289-4404-B50B-135C1E8B4417}"/>
               </a:ext>
             </a:extLst>
           </p:cNvPr>
@@ -13869,7 +13877,7 @@
           <p:cNvPr id="18" name="">
             <a:extLst xmlns:a="http://schemas.openxmlformats.org/drawingml/2006/main">
               <a:ext uri="{FF2B5EF4-FFF2-40B4-BE49-F238E27FC236}">
-                <a16:creationId xmlns:a16="http://schemas.microsoft.com/office/drawing/2014/main" id="{B917561D-C423-44D8-98CB-93A101523765}"/>
+                <a16:creationId xmlns:a16="http://schemas.microsoft.com/office/drawing/2014/main" id="{7897DDEE-C2C8-41F3-985C-5727EF07C75E}"/>
               </a:ext>
             </a:extLst>
           </p:cNvPr>
@@ -13903,7 +13911,7 @@
           <p:cNvPr id="19" name="">
             <a:extLst xmlns:a="http://schemas.openxmlformats.org/drawingml/2006/main">
               <a:ext uri="{FF2B5EF4-FFF2-40B4-BE49-F238E27FC236}">
-                <a16:creationId xmlns:a16="http://schemas.microsoft.com/office/drawing/2014/main" id="{F119F2B4-8DF2-4827-B3F3-632B1CA1724E}"/>
+                <a16:creationId xmlns:a16="http://schemas.microsoft.com/office/drawing/2014/main" id="{2A6FE26F-947D-4668-A5CB-174BEB330A6C}"/>
               </a:ext>
             </a:extLst>
           </p:cNvPr>
@@ -13935,7 +13943,7 @@
           <p:cNvPr id="20" name="">
             <a:extLst xmlns:a="http://schemas.openxmlformats.org/drawingml/2006/main">
               <a:ext uri="{FF2B5EF4-FFF2-40B4-BE49-F238E27FC236}">
-                <a16:creationId xmlns:a16="http://schemas.microsoft.com/office/drawing/2014/main" id="{5436DB40-0586-40DB-B936-8186EF41CD79}"/>
+                <a16:creationId xmlns:a16="http://schemas.microsoft.com/office/drawing/2014/main" id="{91BA713F-9138-45C8-94F1-958FF50BE3B9}"/>
               </a:ext>
             </a:extLst>
           </p:cNvPr>
@@ -13992,7 +14000,7 @@
           <p:cNvPr id="21" name="">
             <a:extLst xmlns:a="http://schemas.openxmlformats.org/drawingml/2006/main">
               <a:ext uri="{FF2B5EF4-FFF2-40B4-BE49-F238E27FC236}">
-                <a16:creationId xmlns:a16="http://schemas.microsoft.com/office/drawing/2014/main" id="{727BB32D-509C-47AC-8A2C-04293C18E621}"/>
+                <a16:creationId xmlns:a16="http://schemas.microsoft.com/office/drawing/2014/main" id="{404F89D9-EF7D-4DA2-A815-0A7AFF434219}"/>
               </a:ext>
             </a:extLst>
           </p:cNvPr>
@@ -14047,7 +14055,7 @@
     </p:spTree>
     <p:extLst>
       <p:ext uri="{BB962C8B-B14F-4D97-AF65-F5344CB8AC3E}">
-        <p14:creationId xmlns:p14="http://schemas.microsoft.com/office/powerpoint/2010/main" val="1020395710"/>
+        <p14:creationId xmlns:p14="http://schemas.microsoft.com/office/powerpoint/2010/main" val="140376889"/>
       </p:ext>
     </p:extLst>
   </p:cSld>
